--- a/reports/kickstarter_presentation.pptx
+++ b/reports/kickstarter_presentation.pptx
@@ -5,20 +5,19 @@
     <p:sldMasterId id="2147483648" r:id="rId1"/>
   </p:sldMasterIdLst>
   <p:sldIdLst>
-    <p:sldId id="256" r:id="rId7"/>
-    <p:sldId id="257" r:id="rId8"/>
-    <p:sldId id="258" r:id="rId9"/>
-    <p:sldId id="259" r:id="rId10"/>
-    <p:sldId id="260" r:id="rId11"/>
-    <p:sldId id="261" r:id="rId12"/>
-    <p:sldId id="262" r:id="rId13"/>
-    <p:sldId id="263" r:id="rId14"/>
-    <p:sldId id="264" r:id="rId15"/>
-    <p:sldId id="265" r:id="rId16"/>
-    <p:sldId id="266" r:id="rId17"/>
-    <p:sldId id="267" r:id="rId18"/>
+    <p:sldId id="256" r:id="rId2"/>
+    <p:sldId id="257" r:id="rId3"/>
+    <p:sldId id="258" r:id="rId4"/>
+    <p:sldId id="259" r:id="rId5"/>
+    <p:sldId id="260" r:id="rId6"/>
+    <p:sldId id="261" r:id="rId7"/>
+    <p:sldId id="262" r:id="rId8"/>
+    <p:sldId id="263" r:id="rId9"/>
+    <p:sldId id="264" r:id="rId10"/>
+    <p:sldId id="265" r:id="rId11"/>
+    <p:sldId id="266" r:id="rId12"/>
   </p:sldIdLst>
-  <p:sldSz cx="12191695" cy="6858000" type="screen4x3"/>
+  <p:sldSz cx="12192000" cy="6858000"/>
   <p:notesSz cx="6858000" cy="9144000"/>
   <p:defaultTextStyle>
     <a:defPPr>
@@ -115,6 +114,22 @@
       </a:defRPr>
     </a:lvl9pPr>
   </p:defaultTextStyle>
+  <p:extLst>
+    <p:ext uri="{EFAFB233-063F-42B5-8137-9DF3F51BA10A}">
+      <p15:sldGuideLst xmlns:p15="http://schemas.microsoft.com/office/powerpoint/2012/main">
+        <p15:guide id="1" orient="horz" pos="2160">
+          <p15:clr>
+            <a:srgbClr val="A4A3A4"/>
+          </p15:clr>
+        </p15:guide>
+        <p15:guide id="2" pos="2880">
+          <p15:clr>
+            <a:srgbClr val="A4A3A4"/>
+          </p15:clr>
+        </p15:guide>
+      </p15:sldGuideLst>
+    </p:ext>
+  </p:extLst>
 </p:presentation>
 </file>
 
@@ -156,10 +171,9 @@
           <a:lstStyle/>
           <a:p>
             <a:r>
-              <a:rPr lang="en-US" smtClean="0"/>
+              <a:rPr lang="en-US"/>
               <a:t>Click to edit Master title style</a:t>
             </a:r>
-            <a:endParaRPr lang="en-US"/>
           </a:p>
         </p:txBody>
       </p:sp>
@@ -275,10 +289,9 @@
           </a:lstStyle>
           <a:p>
             <a:r>
-              <a:rPr lang="en-US" smtClean="0"/>
+              <a:rPr lang="en-US"/>
               <a:t>Click to edit Master subtitle style</a:t>
             </a:r>
-            <a:endParaRPr lang="en-US"/>
           </a:p>
         </p:txBody>
       </p:sp>
@@ -299,7 +312,7 @@
           <a:p>
             <a:fld id="{5BCAD085-E8A6-8845-BD4E-CB4CCA059FC4}" type="datetimeFigureOut">
               <a:rPr lang="en-US" smtClean="0"/>
-              <a:t>1/27/13</a:t>
+              <a:t>5/3/2026</a:t>
             </a:fld>
             <a:endParaRPr lang="en-US"/>
           </a:p>
@@ -393,10 +406,9 @@
           <a:lstStyle/>
           <a:p>
             <a:r>
-              <a:rPr lang="en-US" smtClean="0"/>
+              <a:rPr lang="en-US"/>
               <a:t>Click to edit Master title style</a:t>
             </a:r>
-            <a:endParaRPr lang="en-US"/>
           </a:p>
         </p:txBody>
       </p:sp>
@@ -417,38 +429,37 @@
           <a:p>
             <a:pPr lvl="0"/>
             <a:r>
-              <a:rPr lang="en-US" smtClean="0"/>
+              <a:rPr lang="en-US"/>
               <a:t>Click to edit Master text styles</a:t>
             </a:r>
           </a:p>
           <a:p>
             <a:pPr lvl="1"/>
             <a:r>
-              <a:rPr lang="en-US" smtClean="0"/>
+              <a:rPr lang="en-US"/>
               <a:t>Second level</a:t>
             </a:r>
           </a:p>
           <a:p>
             <a:pPr lvl="2"/>
             <a:r>
-              <a:rPr lang="en-US" smtClean="0"/>
+              <a:rPr lang="en-US"/>
               <a:t>Third level</a:t>
             </a:r>
           </a:p>
           <a:p>
             <a:pPr lvl="3"/>
             <a:r>
-              <a:rPr lang="en-US" smtClean="0"/>
+              <a:rPr lang="en-US"/>
               <a:t>Fourth level</a:t>
             </a:r>
           </a:p>
           <a:p>
             <a:pPr lvl="4"/>
             <a:r>
-              <a:rPr lang="en-US" smtClean="0"/>
+              <a:rPr lang="en-US"/>
               <a:t>Fifth level</a:t>
             </a:r>
-            <a:endParaRPr lang="en-US"/>
           </a:p>
         </p:txBody>
       </p:sp>
@@ -469,7 +480,7 @@
           <a:p>
             <a:fld id="{5BCAD085-E8A6-8845-BD4E-CB4CCA059FC4}" type="datetimeFigureOut">
               <a:rPr lang="en-US" smtClean="0"/>
-              <a:t>1/27/13</a:t>
+              <a:t>5/3/2026</a:t>
             </a:fld>
             <a:endParaRPr lang="en-US"/>
           </a:p>
@@ -568,10 +579,9 @@
           <a:lstStyle/>
           <a:p>
             <a:r>
-              <a:rPr lang="en-US" smtClean="0"/>
+              <a:rPr lang="en-US"/>
               <a:t>Click to edit Master title style</a:t>
             </a:r>
-            <a:endParaRPr lang="en-US"/>
           </a:p>
         </p:txBody>
       </p:sp>
@@ -597,38 +607,37 @@
           <a:p>
             <a:pPr lvl="0"/>
             <a:r>
-              <a:rPr lang="en-US" smtClean="0"/>
+              <a:rPr lang="en-US"/>
               <a:t>Click to edit Master text styles</a:t>
             </a:r>
           </a:p>
           <a:p>
             <a:pPr lvl="1"/>
             <a:r>
-              <a:rPr lang="en-US" smtClean="0"/>
+              <a:rPr lang="en-US"/>
               <a:t>Second level</a:t>
             </a:r>
           </a:p>
           <a:p>
             <a:pPr lvl="2"/>
             <a:r>
-              <a:rPr lang="en-US" smtClean="0"/>
+              <a:rPr lang="en-US"/>
               <a:t>Third level</a:t>
             </a:r>
           </a:p>
           <a:p>
             <a:pPr lvl="3"/>
             <a:r>
-              <a:rPr lang="en-US" smtClean="0"/>
+              <a:rPr lang="en-US"/>
               <a:t>Fourth level</a:t>
             </a:r>
           </a:p>
           <a:p>
             <a:pPr lvl="4"/>
             <a:r>
-              <a:rPr lang="en-US" smtClean="0"/>
+              <a:rPr lang="en-US"/>
               <a:t>Fifth level</a:t>
             </a:r>
-            <a:endParaRPr lang="en-US"/>
           </a:p>
         </p:txBody>
       </p:sp>
@@ -649,7 +658,7 @@
           <a:p>
             <a:fld id="{5BCAD085-E8A6-8845-BD4E-CB4CCA059FC4}" type="datetimeFigureOut">
               <a:rPr lang="en-US" smtClean="0"/>
-              <a:t>1/27/13</a:t>
+              <a:t>5/3/2026</a:t>
             </a:fld>
             <a:endParaRPr lang="en-US"/>
           </a:p>
@@ -743,10 +752,9 @@
           <a:lstStyle/>
           <a:p>
             <a:r>
-              <a:rPr lang="en-US" smtClean="0"/>
+              <a:rPr lang="en-US"/>
               <a:t>Click to edit Master title style</a:t>
             </a:r>
-            <a:endParaRPr lang="en-US"/>
           </a:p>
         </p:txBody>
       </p:sp>
@@ -767,38 +775,37 @@
           <a:p>
             <a:pPr lvl="0"/>
             <a:r>
-              <a:rPr lang="en-US" smtClean="0"/>
+              <a:rPr lang="en-US"/>
               <a:t>Click to edit Master text styles</a:t>
             </a:r>
           </a:p>
           <a:p>
             <a:pPr lvl="1"/>
             <a:r>
-              <a:rPr lang="en-US" smtClean="0"/>
+              <a:rPr lang="en-US"/>
               <a:t>Second level</a:t>
             </a:r>
           </a:p>
           <a:p>
             <a:pPr lvl="2"/>
             <a:r>
-              <a:rPr lang="en-US" smtClean="0"/>
+              <a:rPr lang="en-US"/>
               <a:t>Third level</a:t>
             </a:r>
           </a:p>
           <a:p>
             <a:pPr lvl="3"/>
             <a:r>
-              <a:rPr lang="en-US" smtClean="0"/>
+              <a:rPr lang="en-US"/>
               <a:t>Fourth level</a:t>
             </a:r>
           </a:p>
           <a:p>
             <a:pPr lvl="4"/>
             <a:r>
-              <a:rPr lang="en-US" smtClean="0"/>
+              <a:rPr lang="en-US"/>
               <a:t>Fifth level</a:t>
             </a:r>
-            <a:endParaRPr lang="en-US"/>
           </a:p>
         </p:txBody>
       </p:sp>
@@ -819,7 +826,7 @@
           <a:p>
             <a:fld id="{5BCAD085-E8A6-8845-BD4E-CB4CCA059FC4}" type="datetimeFigureOut">
               <a:rPr lang="en-US" smtClean="0"/>
-              <a:t>1/27/13</a:t>
+              <a:t>5/3/2026</a:t>
             </a:fld>
             <a:endParaRPr lang="en-US"/>
           </a:p>
@@ -922,10 +929,9 @@
           </a:lstStyle>
           <a:p>
             <a:r>
-              <a:rPr lang="en-US" smtClean="0"/>
+              <a:rPr lang="en-US"/>
               <a:t>Click to edit Master title style</a:t>
             </a:r>
-            <a:endParaRPr lang="en-US"/>
           </a:p>
         </p:txBody>
       </p:sp>
@@ -1042,7 +1048,7 @@
           <a:p>
             <a:pPr lvl="0"/>
             <a:r>
-              <a:rPr lang="en-US" smtClean="0"/>
+              <a:rPr lang="en-US"/>
               <a:t>Click to edit Master text styles</a:t>
             </a:r>
           </a:p>
@@ -1065,7 +1071,7 @@
           <a:p>
             <a:fld id="{5BCAD085-E8A6-8845-BD4E-CB4CCA059FC4}" type="datetimeFigureOut">
               <a:rPr lang="en-US" smtClean="0"/>
-              <a:t>1/27/13</a:t>
+              <a:t>5/3/2026</a:t>
             </a:fld>
             <a:endParaRPr lang="en-US"/>
           </a:p>
@@ -1159,10 +1165,9 @@
           <a:lstStyle/>
           <a:p>
             <a:r>
-              <a:rPr lang="en-US" smtClean="0"/>
+              <a:rPr lang="en-US"/>
               <a:t>Click to edit Master title style</a:t>
             </a:r>
-            <a:endParaRPr lang="en-US"/>
           </a:p>
         </p:txBody>
       </p:sp>
@@ -1216,38 +1221,37 @@
           <a:p>
             <a:pPr lvl="0"/>
             <a:r>
-              <a:rPr lang="en-US" smtClean="0"/>
+              <a:rPr lang="en-US"/>
               <a:t>Click to edit Master text styles</a:t>
             </a:r>
           </a:p>
           <a:p>
             <a:pPr lvl="1"/>
             <a:r>
-              <a:rPr lang="en-US" smtClean="0"/>
+              <a:rPr lang="en-US"/>
               <a:t>Second level</a:t>
             </a:r>
           </a:p>
           <a:p>
             <a:pPr lvl="2"/>
             <a:r>
-              <a:rPr lang="en-US" smtClean="0"/>
+              <a:rPr lang="en-US"/>
               <a:t>Third level</a:t>
             </a:r>
           </a:p>
           <a:p>
             <a:pPr lvl="3"/>
             <a:r>
-              <a:rPr lang="en-US" smtClean="0"/>
+              <a:rPr lang="en-US"/>
               <a:t>Fourth level</a:t>
             </a:r>
           </a:p>
           <a:p>
             <a:pPr lvl="4"/>
             <a:r>
-              <a:rPr lang="en-US" smtClean="0"/>
+              <a:rPr lang="en-US"/>
               <a:t>Fifth level</a:t>
             </a:r>
-            <a:endParaRPr lang="en-US"/>
           </a:p>
         </p:txBody>
       </p:sp>
@@ -1301,38 +1305,37 @@
           <a:p>
             <a:pPr lvl="0"/>
             <a:r>
-              <a:rPr lang="en-US" smtClean="0"/>
+              <a:rPr lang="en-US"/>
               <a:t>Click to edit Master text styles</a:t>
             </a:r>
           </a:p>
           <a:p>
             <a:pPr lvl="1"/>
             <a:r>
-              <a:rPr lang="en-US" smtClean="0"/>
+              <a:rPr lang="en-US"/>
               <a:t>Second level</a:t>
             </a:r>
           </a:p>
           <a:p>
             <a:pPr lvl="2"/>
             <a:r>
-              <a:rPr lang="en-US" smtClean="0"/>
+              <a:rPr lang="en-US"/>
               <a:t>Third level</a:t>
             </a:r>
           </a:p>
           <a:p>
             <a:pPr lvl="3"/>
             <a:r>
-              <a:rPr lang="en-US" smtClean="0"/>
+              <a:rPr lang="en-US"/>
               <a:t>Fourth level</a:t>
             </a:r>
           </a:p>
           <a:p>
             <a:pPr lvl="4"/>
             <a:r>
-              <a:rPr lang="en-US" smtClean="0"/>
+              <a:rPr lang="en-US"/>
               <a:t>Fifth level</a:t>
             </a:r>
-            <a:endParaRPr lang="en-US"/>
           </a:p>
         </p:txBody>
       </p:sp>
@@ -1353,7 +1356,7 @@
           <a:p>
             <a:fld id="{5BCAD085-E8A6-8845-BD4E-CB4CCA059FC4}" type="datetimeFigureOut">
               <a:rPr lang="en-US" smtClean="0"/>
-              <a:t>1/27/13</a:t>
+              <a:t>5/3/2026</a:t>
             </a:fld>
             <a:endParaRPr lang="en-US"/>
           </a:p>
@@ -1451,10 +1454,9 @@
           </a:lstStyle>
           <a:p>
             <a:r>
-              <a:rPr lang="en-US" smtClean="0"/>
+              <a:rPr lang="en-US"/>
               <a:t>Click to edit Master title style</a:t>
             </a:r>
-            <a:endParaRPr lang="en-US"/>
           </a:p>
         </p:txBody>
       </p:sp>
@@ -1517,7 +1519,7 @@
           <a:p>
             <a:pPr lvl="0"/>
             <a:r>
-              <a:rPr lang="en-US" smtClean="0"/>
+              <a:rPr lang="en-US"/>
               <a:t>Click to edit Master text styles</a:t>
             </a:r>
           </a:p>
@@ -1573,38 +1575,37 @@
           <a:p>
             <a:pPr lvl="0"/>
             <a:r>
-              <a:rPr lang="en-US" smtClean="0"/>
+              <a:rPr lang="en-US"/>
               <a:t>Click to edit Master text styles</a:t>
             </a:r>
           </a:p>
           <a:p>
             <a:pPr lvl="1"/>
             <a:r>
-              <a:rPr lang="en-US" smtClean="0"/>
+              <a:rPr lang="en-US"/>
               <a:t>Second level</a:t>
             </a:r>
           </a:p>
           <a:p>
             <a:pPr lvl="2"/>
             <a:r>
-              <a:rPr lang="en-US" smtClean="0"/>
+              <a:rPr lang="en-US"/>
               <a:t>Third level</a:t>
             </a:r>
           </a:p>
           <a:p>
             <a:pPr lvl="3"/>
             <a:r>
-              <a:rPr lang="en-US" smtClean="0"/>
+              <a:rPr lang="en-US"/>
               <a:t>Fourth level</a:t>
             </a:r>
           </a:p>
           <a:p>
             <a:pPr lvl="4"/>
             <a:r>
-              <a:rPr lang="en-US" smtClean="0"/>
+              <a:rPr lang="en-US"/>
               <a:t>Fifth level</a:t>
             </a:r>
-            <a:endParaRPr lang="en-US"/>
           </a:p>
         </p:txBody>
       </p:sp>
@@ -1667,7 +1668,7 @@
           <a:p>
             <a:pPr lvl="0"/>
             <a:r>
-              <a:rPr lang="en-US" smtClean="0"/>
+              <a:rPr lang="en-US"/>
               <a:t>Click to edit Master text styles</a:t>
             </a:r>
           </a:p>
@@ -1723,38 +1724,37 @@
           <a:p>
             <a:pPr lvl="0"/>
             <a:r>
-              <a:rPr lang="en-US" smtClean="0"/>
+              <a:rPr lang="en-US"/>
               <a:t>Click to edit Master text styles</a:t>
             </a:r>
           </a:p>
           <a:p>
             <a:pPr lvl="1"/>
             <a:r>
-              <a:rPr lang="en-US" smtClean="0"/>
+              <a:rPr lang="en-US"/>
               <a:t>Second level</a:t>
             </a:r>
           </a:p>
           <a:p>
             <a:pPr lvl="2"/>
             <a:r>
-              <a:rPr lang="en-US" smtClean="0"/>
+              <a:rPr lang="en-US"/>
               <a:t>Third level</a:t>
             </a:r>
           </a:p>
           <a:p>
             <a:pPr lvl="3"/>
             <a:r>
-              <a:rPr lang="en-US" smtClean="0"/>
+              <a:rPr lang="en-US"/>
               <a:t>Fourth level</a:t>
             </a:r>
           </a:p>
           <a:p>
             <a:pPr lvl="4"/>
             <a:r>
-              <a:rPr lang="en-US" smtClean="0"/>
+              <a:rPr lang="en-US"/>
               <a:t>Fifth level</a:t>
             </a:r>
-            <a:endParaRPr lang="en-US"/>
           </a:p>
         </p:txBody>
       </p:sp>
@@ -1775,7 +1775,7 @@
           <a:p>
             <a:fld id="{5BCAD085-E8A6-8845-BD4E-CB4CCA059FC4}" type="datetimeFigureOut">
               <a:rPr lang="en-US" smtClean="0"/>
-              <a:t>1/27/13</a:t>
+              <a:t>5/3/2026</a:t>
             </a:fld>
             <a:endParaRPr lang="en-US"/>
           </a:p>
@@ -1869,10 +1869,9 @@
           <a:lstStyle/>
           <a:p>
             <a:r>
-              <a:rPr lang="en-US" smtClean="0"/>
+              <a:rPr lang="en-US"/>
               <a:t>Click to edit Master title style</a:t>
             </a:r>
-            <a:endParaRPr lang="en-US"/>
           </a:p>
         </p:txBody>
       </p:sp>
@@ -1893,7 +1892,7 @@
           <a:p>
             <a:fld id="{5BCAD085-E8A6-8845-BD4E-CB4CCA059FC4}" type="datetimeFigureOut">
               <a:rPr lang="en-US" smtClean="0"/>
-              <a:t>1/27/13</a:t>
+              <a:t>5/3/2026</a:t>
             </a:fld>
             <a:endParaRPr lang="en-US"/>
           </a:p>
@@ -1988,7 +1987,7 @@
           <a:p>
             <a:fld id="{5BCAD085-E8A6-8845-BD4E-CB4CCA059FC4}" type="datetimeFigureOut">
               <a:rPr lang="en-US" smtClean="0"/>
-              <a:t>1/27/13</a:t>
+              <a:t>5/3/2026</a:t>
             </a:fld>
             <a:endParaRPr lang="en-US"/>
           </a:p>
@@ -2091,10 +2090,9 @@
           </a:lstStyle>
           <a:p>
             <a:r>
-              <a:rPr lang="en-US" smtClean="0"/>
+              <a:rPr lang="en-US"/>
               <a:t>Click to edit Master title style</a:t>
             </a:r>
-            <a:endParaRPr lang="en-US"/>
           </a:p>
         </p:txBody>
       </p:sp>
@@ -2148,38 +2146,37 @@
           <a:p>
             <a:pPr lvl="0"/>
             <a:r>
-              <a:rPr lang="en-US" smtClean="0"/>
+              <a:rPr lang="en-US"/>
               <a:t>Click to edit Master text styles</a:t>
             </a:r>
           </a:p>
           <a:p>
             <a:pPr lvl="1"/>
             <a:r>
-              <a:rPr lang="en-US" smtClean="0"/>
+              <a:rPr lang="en-US"/>
               <a:t>Second level</a:t>
             </a:r>
           </a:p>
           <a:p>
             <a:pPr lvl="2"/>
             <a:r>
-              <a:rPr lang="en-US" smtClean="0"/>
+              <a:rPr lang="en-US"/>
               <a:t>Third level</a:t>
             </a:r>
           </a:p>
           <a:p>
             <a:pPr lvl="3"/>
             <a:r>
-              <a:rPr lang="en-US" smtClean="0"/>
+              <a:rPr lang="en-US"/>
               <a:t>Fourth level</a:t>
             </a:r>
           </a:p>
           <a:p>
             <a:pPr lvl="4"/>
             <a:r>
-              <a:rPr lang="en-US" smtClean="0"/>
+              <a:rPr lang="en-US"/>
               <a:t>Fifth level</a:t>
             </a:r>
-            <a:endParaRPr lang="en-US"/>
           </a:p>
         </p:txBody>
       </p:sp>
@@ -2242,7 +2239,7 @@
           <a:p>
             <a:pPr lvl="0"/>
             <a:r>
-              <a:rPr lang="en-US" smtClean="0"/>
+              <a:rPr lang="en-US"/>
               <a:t>Click to edit Master text styles</a:t>
             </a:r>
           </a:p>
@@ -2265,7 +2262,7 @@
           <a:p>
             <a:fld id="{5BCAD085-E8A6-8845-BD4E-CB4CCA059FC4}" type="datetimeFigureOut">
               <a:rPr lang="en-US" smtClean="0"/>
-              <a:t>1/27/13</a:t>
+              <a:t>5/3/2026</a:t>
             </a:fld>
             <a:endParaRPr lang="en-US"/>
           </a:p>
@@ -2368,10 +2365,9 @@
           </a:lstStyle>
           <a:p>
             <a:r>
-              <a:rPr lang="en-US" smtClean="0"/>
+              <a:rPr lang="en-US"/>
               <a:t>Click to edit Master title style</a:t>
             </a:r>
-            <a:endParaRPr lang="en-US"/>
           </a:p>
         </p:txBody>
       </p:sp>
@@ -2495,7 +2491,7 @@
           <a:p>
             <a:pPr lvl="0"/>
             <a:r>
-              <a:rPr lang="en-US" smtClean="0"/>
+              <a:rPr lang="en-US"/>
               <a:t>Click to edit Master text styles</a:t>
             </a:r>
           </a:p>
@@ -2518,7 +2514,7 @@
           <a:p>
             <a:fld id="{5BCAD085-E8A6-8845-BD4E-CB4CCA059FC4}" type="datetimeFigureOut">
               <a:rPr lang="en-US" smtClean="0"/>
-              <a:t>1/27/13</a:t>
+              <a:t>5/3/2026</a:t>
             </a:fld>
             <a:endParaRPr lang="en-US"/>
           </a:p>
@@ -2627,10 +2623,9 @@
           <a:lstStyle/>
           <a:p>
             <a:r>
-              <a:rPr lang="en-US" smtClean="0"/>
+              <a:rPr lang="en-US"/>
               <a:t>Click to edit Master title style</a:t>
             </a:r>
-            <a:endParaRPr lang="en-US"/>
           </a:p>
         </p:txBody>
       </p:sp>
@@ -2661,38 +2656,37 @@
           <a:p>
             <a:pPr lvl="0"/>
             <a:r>
-              <a:rPr lang="en-US" smtClean="0"/>
+              <a:rPr lang="en-US"/>
               <a:t>Click to edit Master text styles</a:t>
             </a:r>
           </a:p>
           <a:p>
             <a:pPr lvl="1"/>
             <a:r>
-              <a:rPr lang="en-US" smtClean="0"/>
+              <a:rPr lang="en-US"/>
               <a:t>Second level</a:t>
             </a:r>
           </a:p>
           <a:p>
             <a:pPr lvl="2"/>
             <a:r>
-              <a:rPr lang="en-US" smtClean="0"/>
+              <a:rPr lang="en-US"/>
               <a:t>Third level</a:t>
             </a:r>
           </a:p>
           <a:p>
             <a:pPr lvl="3"/>
             <a:r>
-              <a:rPr lang="en-US" smtClean="0"/>
+              <a:rPr lang="en-US"/>
               <a:t>Fourth level</a:t>
             </a:r>
           </a:p>
           <a:p>
             <a:pPr lvl="4"/>
             <a:r>
-              <a:rPr lang="en-US" smtClean="0"/>
+              <a:rPr lang="en-US"/>
               <a:t>Fifth level</a:t>
             </a:r>
-            <a:endParaRPr lang="en-US"/>
           </a:p>
         </p:txBody>
       </p:sp>
@@ -2731,7 +2725,7 @@
           <a:p>
             <a:fld id="{5BCAD085-E8A6-8845-BD4E-CB4CCA059FC4}" type="datetimeFigureOut">
               <a:rPr lang="en-US" smtClean="0"/>
-              <a:t>1/27/13</a:t>
+              <a:t>5/3/2026</a:t>
             </a:fld>
             <a:endParaRPr lang="en-US"/>
           </a:p>
@@ -3090,7 +3084,7 @@
 </file>
 
 <file path=ppt/slides/slide1.xml><?xml version="1.0" encoding="utf-8"?>
-<p:sld xmlns:a="http://schemas.openxmlformats.org/drawingml/2006/main" xmlns:p="http://schemas.openxmlformats.org/presentationml/2006/main" xmlns:r="http://schemas.openxmlformats.org/officeDocument/2006/relationships">
+<p:sld xmlns:a="http://schemas.openxmlformats.org/drawingml/2006/main" xmlns:r="http://schemas.openxmlformats.org/officeDocument/2006/relationships" xmlns:p="http://schemas.openxmlformats.org/presentationml/2006/main">
   <p:cSld>
     <p:spTree>
       <p:nvGrpSpPr>
@@ -3098,7 +3092,14 @@
         <p:cNvGrpSpPr/>
         <p:nvPr/>
       </p:nvGrpSpPr>
-      <p:grpSpPr/>
+      <p:grpSpPr>
+        <a:xfrm>
+          <a:off x="0" y="0"/>
+          <a:ext cx="0" cy="0"/>
+          <a:chOff x="0" y="0"/>
+          <a:chExt cx="0" cy="0"/>
+        </a:xfrm>
+      </p:grpSpPr>
       <p:sp>
         <p:nvSpPr>
           <p:cNvPr id="2" name="Rectangle 1"/>
@@ -3139,6 +3140,7 @@
           <a:lstStyle/>
           <a:p>
             <a:pPr algn="ctr"/>
+            <a:endParaRPr/>
           </a:p>
         </p:txBody>
       </p:sp>
@@ -3182,6 +3184,7 @@
           <a:lstStyle/>
           <a:p>
             <a:pPr algn="ctr"/>
+            <a:endParaRPr/>
           </a:p>
         </p:txBody>
       </p:sp>
@@ -3202,7 +3205,7 @@
           <a:noFill/>
         </p:spPr>
         <p:txBody>
-          <a:bodyPr wrap="square" lIns="45720" rIns="45720" tIns="18288" bIns="18288">
+          <a:bodyPr wrap="square" lIns="45720" tIns="18288" rIns="45720" bIns="18288">
             <a:spAutoFit/>
           </a:bodyPr>
           <a:lstStyle/>
@@ -3236,7 +3239,7 @@
           <a:noFill/>
         </p:spPr>
         <p:txBody>
-          <a:bodyPr wrap="square" lIns="45720" rIns="45720" tIns="18288" bIns="18288">
+          <a:bodyPr wrap="square" lIns="45720" tIns="18288" rIns="45720" bIns="18288">
             <a:spAutoFit/>
           </a:bodyPr>
           <a:lstStyle/>
@@ -3262,27 +3265,42 @@
         <p:spPr>
           <a:xfrm>
             <a:off x="548640" y="4937760"/>
-            <a:ext cx="11155680" cy="457200"/>
-          </a:xfrm>
-          <a:prstGeom prst="rect">
-            <a:avLst/>
-          </a:prstGeom>
-          <a:noFill/>
-        </p:spPr>
-        <p:txBody>
-          <a:bodyPr wrap="square" lIns="45720" rIns="45720" tIns="18288" bIns="18288">
-            <a:spAutoFit/>
-          </a:bodyPr>
-          <a:lstStyle/>
-          <a:p>
-            <a:pPr algn="l"/>
-            <a:r>
-              <a:rPr sz="1800" b="1">
+            <a:ext cx="11155680" cy="313932"/>
+          </a:xfrm>
+          <a:prstGeom prst="rect">
+            <a:avLst/>
+          </a:prstGeom>
+          <a:noFill/>
+        </p:spPr>
+        <p:txBody>
+          <a:bodyPr wrap="square" lIns="45720" tIns="18288" rIns="45720" bIns="18288">
+            <a:spAutoFit/>
+          </a:bodyPr>
+          <a:lstStyle/>
+          <a:p>
+            <a:r>
+              <a:rPr sz="1800" b="1" dirty="0">
                 <a:solidFill>
                   <a:srgbClr val="122A4F"/>
                 </a:solidFill>
               </a:rPr>
               <a:t>Omar Doughan</a:t>
+            </a:r>
+            <a:r>
+              <a:rPr lang="en-US" dirty="0">
+                <a:solidFill>
+                  <a:srgbClr val="555555"/>
+                </a:solidFill>
+              </a:rPr>
+              <a:t> ·</a:t>
+            </a:r>
+            <a:r>
+              <a:rPr lang="en-US" sz="1800" b="1" dirty="0">
+                <a:solidFill>
+                  <a:srgbClr val="122A4F"/>
+                </a:solidFill>
+              </a:rPr>
+              <a:t> Ryan Masri</a:t>
             </a:r>
           </a:p>
         </p:txBody>
@@ -3304,19 +3322,43 @@
           <a:noFill/>
         </p:spPr>
         <p:txBody>
-          <a:bodyPr wrap="square" lIns="45720" rIns="45720" tIns="18288" bIns="18288">
+          <a:bodyPr wrap="square" lIns="45720" tIns="18288" rIns="45720" bIns="18288">
             <a:spAutoFit/>
           </a:bodyPr>
           <a:lstStyle/>
           <a:p>
             <a:pPr algn="l"/>
             <a:r>
-              <a:rPr sz="1400" b="0">
+              <a:rPr sz="1400" b="0" dirty="0" err="1">
                 <a:solidFill>
                   <a:srgbClr val="555555"/>
                 </a:solidFill>
               </a:rPr>
-              <a:t>XGBoost  ·  SHAP  ·  Streamlit  ·  Hugging Face Spaces</a:t>
+              <a:t>XGBoost</a:t>
+            </a:r>
+            <a:r>
+              <a:rPr sz="1400" b="0" dirty="0">
+                <a:solidFill>
+                  <a:srgbClr val="555555"/>
+                </a:solidFill>
+              </a:rPr>
+              <a:t>  ·  SHAP  ·  </a:t>
+            </a:r>
+            <a:r>
+              <a:rPr sz="1400" b="0" dirty="0" err="1">
+                <a:solidFill>
+                  <a:srgbClr val="555555"/>
+                </a:solidFill>
+              </a:rPr>
+              <a:t>Streamlit</a:t>
+            </a:r>
+            <a:r>
+              <a:rPr sz="1400" b="0" dirty="0">
+                <a:solidFill>
+                  <a:srgbClr val="555555"/>
+                </a:solidFill>
+              </a:rPr>
+              <a:t>  ·  Hugging Face Spaces</a:t>
             </a:r>
           </a:p>
         </p:txBody>
@@ -3330,7 +3372,7 @@
 </file>
 
 <file path=ppt/slides/slide10.xml><?xml version="1.0" encoding="utf-8"?>
-<p:sld xmlns:a="http://schemas.openxmlformats.org/drawingml/2006/main" xmlns:p="http://schemas.openxmlformats.org/presentationml/2006/main" xmlns:r="http://schemas.openxmlformats.org/officeDocument/2006/relationships">
+<p:sld xmlns:a="http://schemas.openxmlformats.org/drawingml/2006/main" xmlns:r="http://schemas.openxmlformats.org/officeDocument/2006/relationships" xmlns:p="http://schemas.openxmlformats.org/presentationml/2006/main">
   <p:cSld>
     <p:spTree>
       <p:nvGrpSpPr>
@@ -3338,7 +3380,14 @@
         <p:cNvGrpSpPr/>
         <p:nvPr/>
       </p:nvGrpSpPr>
-      <p:grpSpPr/>
+      <p:grpSpPr>
+        <a:xfrm>
+          <a:off x="0" y="0"/>
+          <a:ext cx="0" cy="0"/>
+          <a:chOff x="0" y="0"/>
+          <a:chExt cx="0" cy="0"/>
+        </a:xfrm>
+      </p:grpSpPr>
       <p:sp>
         <p:nvSpPr>
           <p:cNvPr id="2" name="Rectangle 1"/>
@@ -3379,6 +3428,7 @@
           <a:lstStyle/>
           <a:p>
             <a:pPr algn="ctr"/>
+            <a:endParaRPr/>
           </a:p>
         </p:txBody>
       </p:sp>
@@ -3422,40 +3472,7 @@
           <a:lstStyle/>
           <a:p>
             <a:pPr algn="ctr"/>
-          </a:p>
-        </p:txBody>
-      </p:sp>
-      <p:sp>
-        <p:nvSpPr>
-          <p:cNvPr id="4" name="TextBox 3"/>
-          <p:cNvSpPr txBox="1"/>
-          <p:nvPr/>
-        </p:nvSpPr>
-        <p:spPr>
-          <a:xfrm>
-            <a:off x="365760" y="109728"/>
-            <a:ext cx="5486400" cy="365760"/>
-          </a:xfrm>
-          <a:prstGeom prst="rect">
-            <a:avLst/>
-          </a:prstGeom>
-          <a:noFill/>
-        </p:spPr>
-        <p:txBody>
-          <a:bodyPr wrap="square" lIns="45720" rIns="45720" tIns="18288" bIns="18288">
-            <a:spAutoFit/>
-          </a:bodyPr>
-          <a:lstStyle/>
-          <a:p>
-            <a:pPr algn="l"/>
-            <a:r>
-              <a:rPr sz="1200" b="1">
-                <a:solidFill>
-                  <a:srgbClr val="FFFFFF"/>
-                </a:solidFill>
-              </a:rPr>
-              <a:t>PR3 / PR4  ·  CASE STUDY</a:t>
-            </a:r>
+            <a:endParaRPr/>
           </a:p>
         </p:txBody>
       </p:sp>
@@ -3476,7 +3493,7 @@
           <a:noFill/>
         </p:spPr>
         <p:txBody>
-          <a:bodyPr wrap="square" lIns="45720" rIns="45720" tIns="18288" bIns="18288">
+          <a:bodyPr wrap="square" lIns="45720" tIns="18288" rIns="45720" bIns="18288">
             <a:spAutoFit/>
           </a:bodyPr>
           <a:lstStyle/>
@@ -3502,28 +3519,33 @@
         <p:spPr>
           <a:xfrm>
             <a:off x="548640" y="1691640"/>
-            <a:ext cx="11064240" cy="731520"/>
-          </a:xfrm>
-          <a:prstGeom prst="rect">
-            <a:avLst/>
-          </a:prstGeom>
-          <a:noFill/>
-        </p:spPr>
-        <p:txBody>
-          <a:bodyPr wrap="square" lIns="45720" rIns="45720" tIns="18288" bIns="18288">
+            <a:ext cx="11064240" cy="652486"/>
+          </a:xfrm>
+          <a:prstGeom prst="rect">
+            <a:avLst/>
+          </a:prstGeom>
+          <a:noFill/>
+        </p:spPr>
+        <p:txBody>
+          <a:bodyPr wrap="square" lIns="45720" tIns="18288" rIns="45720" bIns="18288">
             <a:spAutoFit/>
           </a:bodyPr>
           <a:lstStyle/>
           <a:p>
             <a:pPr algn="l"/>
             <a:r>
-              <a:rPr sz="1600" b="0">
+              <a:rPr lang="en-US" sz="2000" b="0" dirty="0">
                 <a:solidFill>
                   <a:srgbClr val="555555"/>
                 </a:solidFill>
               </a:rPr>
-              <a:t>N = 49 is too small for reliable subgroup metrics (95% CI on AUROC ≈ 0.66–0.93). We go qualitative.</a:t>
-            </a:r>
+              <a:t>N=49 is too small for reliable subgroup metrics; results have high uncertainty, so we treat this as a small qualitative case-study.</a:t>
+            </a:r>
+            <a:endParaRPr sz="2000" b="0" dirty="0">
+              <a:solidFill>
+                <a:srgbClr val="555555"/>
+              </a:solidFill>
+            </a:endParaRPr>
           </a:p>
         </p:txBody>
       </p:sp>
@@ -3569,6 +3591,7 @@
           <a:lstStyle/>
           <a:p>
             <a:pPr algn="ctr"/>
+            <a:endParaRPr/>
           </a:p>
         </p:txBody>
       </p:sp>
@@ -3589,7 +3612,7 @@
           <a:noFill/>
         </p:spPr>
         <p:txBody>
-          <a:bodyPr wrap="square" lIns="45720" rIns="45720" tIns="18288" bIns="18288">
+          <a:bodyPr wrap="square" lIns="45720" tIns="18288" rIns="45720" bIns="18288">
             <a:spAutoFit/>
           </a:bodyPr>
           <a:lstStyle/>
@@ -3623,7 +3646,7 @@
           <a:noFill/>
         </p:spPr>
         <p:txBody>
-          <a:bodyPr wrap="square" lIns="45720" rIns="45720" tIns="18288" bIns="18288">
+          <a:bodyPr wrap="square" lIns="45720" tIns="18288" rIns="45720" bIns="18288">
             <a:spAutoFit/>
           </a:bodyPr>
           <a:lstStyle/>
@@ -3657,7 +3680,7 @@
           <a:noFill/>
         </p:spPr>
         <p:txBody>
-          <a:bodyPr wrap="square" lIns="45720" rIns="45720" tIns="18288" bIns="18288">
+          <a:bodyPr wrap="square" lIns="45720" tIns="18288" rIns="45720" bIns="18288">
             <a:spAutoFit/>
           </a:bodyPr>
           <a:lstStyle/>
@@ -3738,6 +3761,7 @@
           <a:lstStyle/>
           <a:p>
             <a:pPr algn="ctr"/>
+            <a:endParaRPr/>
           </a:p>
         </p:txBody>
       </p:sp>
@@ -3758,7 +3782,7 @@
           <a:noFill/>
         </p:spPr>
         <p:txBody>
-          <a:bodyPr wrap="square" lIns="45720" rIns="45720" tIns="18288" bIns="18288">
+          <a:bodyPr wrap="square" lIns="45720" tIns="18288" rIns="45720" bIns="18288">
             <a:spAutoFit/>
           </a:bodyPr>
           <a:lstStyle/>
@@ -3792,7 +3816,7 @@
           <a:noFill/>
         </p:spPr>
         <p:txBody>
-          <a:bodyPr wrap="square" lIns="45720" rIns="45720" tIns="18288" bIns="18288">
+          <a:bodyPr wrap="square" lIns="45720" tIns="18288" rIns="45720" bIns="18288">
             <a:spAutoFit/>
           </a:bodyPr>
           <a:lstStyle/>
@@ -3826,7 +3850,7 @@
           <a:noFill/>
         </p:spPr>
         <p:txBody>
-          <a:bodyPr wrap="square" lIns="45720" rIns="45720" tIns="18288" bIns="18288">
+          <a:bodyPr wrap="square" lIns="45720" tIns="18288" rIns="45720" bIns="18288">
             <a:spAutoFit/>
           </a:bodyPr>
           <a:lstStyle/>
@@ -3907,6 +3931,7 @@
           <a:lstStyle/>
           <a:p>
             <a:pPr algn="ctr"/>
+            <a:endParaRPr/>
           </a:p>
         </p:txBody>
       </p:sp>
@@ -3927,7 +3952,7 @@
           <a:noFill/>
         </p:spPr>
         <p:txBody>
-          <a:bodyPr wrap="square" lIns="45720" rIns="45720" tIns="18288" bIns="18288">
+          <a:bodyPr wrap="square" lIns="45720" tIns="18288" rIns="45720" bIns="18288">
             <a:spAutoFit/>
           </a:bodyPr>
           <a:lstStyle/>
@@ -3961,7 +3986,7 @@
           <a:noFill/>
         </p:spPr>
         <p:txBody>
-          <a:bodyPr wrap="square" lIns="45720" rIns="45720" tIns="18288" bIns="18288">
+          <a:bodyPr wrap="square" lIns="45720" tIns="18288" rIns="45720" bIns="18288">
             <a:spAutoFit/>
           </a:bodyPr>
           <a:lstStyle/>
@@ -3995,7 +4020,7 @@
           <a:noFill/>
         </p:spPr>
         <p:txBody>
-          <a:bodyPr wrap="square" lIns="45720" rIns="45720" tIns="18288" bIns="18288">
+          <a:bodyPr wrap="square" lIns="45720" tIns="18288" rIns="45720" bIns="18288">
             <a:spAutoFit/>
           </a:bodyPr>
           <a:lstStyle/>
@@ -4021,27 +4046,43 @@
         <p:spPr>
           <a:xfrm>
             <a:off x="548640" y="5166360"/>
-            <a:ext cx="11064240" cy="457200"/>
-          </a:xfrm>
-          <a:prstGeom prst="rect">
-            <a:avLst/>
-          </a:prstGeom>
-          <a:noFill/>
-        </p:spPr>
-        <p:txBody>
-          <a:bodyPr wrap="square" lIns="45720" rIns="45720" tIns="18288" bIns="18288">
+            <a:ext cx="11064240" cy="252377"/>
+          </a:xfrm>
+          <a:prstGeom prst="rect">
+            <a:avLst/>
+          </a:prstGeom>
+          <a:noFill/>
+        </p:spPr>
+        <p:txBody>
+          <a:bodyPr wrap="square" lIns="45720" tIns="18288" rIns="45720" bIns="18288">
             <a:spAutoFit/>
           </a:bodyPr>
           <a:lstStyle/>
           <a:p>
             <a:pPr algn="l"/>
             <a:r>
-              <a:rPr sz="1400" b="0">
+              <a:rPr sz="1400" b="0" dirty="0">
                 <a:solidFill>
                   <a:srgbClr val="555555"/>
                 </a:solidFill>
               </a:rPr>
-              <a:t>Plus 3 hypothetical personas (relief film · cookbook · LB-based EP) — see lebanon_deep_case_study.md for the full walk-throughs.</a:t>
+              <a:t>Plus 3 hypothetical personas (relief film · cookbook · LB-based EP) —</a:t>
+            </a:r>
+            <a:r>
+              <a:rPr lang="en-US" sz="1400" b="0" dirty="0">
+                <a:solidFill>
+                  <a:srgbClr val="555555"/>
+                </a:solidFill>
+              </a:rPr>
+              <a:t> check </a:t>
+            </a:r>
+            <a:r>
+              <a:rPr sz="1400" b="0" dirty="0">
+                <a:solidFill>
+                  <a:srgbClr val="555555"/>
+                </a:solidFill>
+              </a:rPr>
+              <a:t>lebanon_deep_case_study.md.</a:t>
             </a:r>
           </a:p>
         </p:txBody>
@@ -4055,28 +4096,41 @@
         <p:spPr>
           <a:xfrm>
             <a:off x="10515600" y="6446520"/>
-            <a:ext cx="1554480" cy="274320"/>
-          </a:xfrm>
-          <a:prstGeom prst="rect">
-            <a:avLst/>
-          </a:prstGeom>
-          <a:noFill/>
-        </p:spPr>
-        <p:txBody>
-          <a:bodyPr wrap="square" lIns="45720" rIns="45720" tIns="18288" bIns="18288">
+            <a:ext cx="1554480" cy="190821"/>
+          </a:xfrm>
+          <a:prstGeom prst="rect">
+            <a:avLst/>
+          </a:prstGeom>
+          <a:noFill/>
+        </p:spPr>
+        <p:txBody>
+          <a:bodyPr wrap="square" lIns="45720" tIns="18288" rIns="45720" bIns="18288">
             <a:spAutoFit/>
           </a:bodyPr>
           <a:lstStyle/>
           <a:p>
             <a:pPr algn="r"/>
             <a:r>
-              <a:rPr sz="1000" b="0">
+              <a:rPr sz="1000" b="0" dirty="0">
                 <a:solidFill>
                   <a:srgbClr val="555555"/>
                 </a:solidFill>
               </a:rPr>
-              <a:t>10 / 12</a:t>
-            </a:r>
+              <a:t>10 / </a:t>
+            </a:r>
+            <a:r>
+              <a:rPr lang="en-US" sz="1000" b="0" dirty="0">
+                <a:solidFill>
+                  <a:srgbClr val="555555"/>
+                </a:solidFill>
+              </a:rPr>
+              <a:t>11</a:t>
+            </a:r>
+            <a:endParaRPr sz="1000" b="0" dirty="0">
+              <a:solidFill>
+                <a:srgbClr val="555555"/>
+              </a:solidFill>
+            </a:endParaRPr>
           </a:p>
         </p:txBody>
       </p:sp>
@@ -4089,28 +4143,48 @@
         <p:spPr>
           <a:xfrm>
             <a:off x="365760" y="6446520"/>
-            <a:ext cx="7315200" cy="274320"/>
-          </a:xfrm>
-          <a:prstGeom prst="rect">
-            <a:avLst/>
-          </a:prstGeom>
-          <a:noFill/>
-        </p:spPr>
-        <p:txBody>
-          <a:bodyPr wrap="square" lIns="45720" rIns="45720" tIns="18288" bIns="18288">
-            <a:spAutoFit/>
-          </a:bodyPr>
-          <a:lstStyle/>
-          <a:p>
-            <a:pPr algn="l"/>
-            <a:r>
-              <a:rPr sz="1000" b="0">
+            <a:ext cx="7315200" cy="190821"/>
+          </a:xfrm>
+          <a:prstGeom prst="rect">
+            <a:avLst/>
+          </a:prstGeom>
+          <a:noFill/>
+        </p:spPr>
+        <p:txBody>
+          <a:bodyPr wrap="square" lIns="45720" tIns="18288" rIns="45720" bIns="18288">
+            <a:spAutoFit/>
+          </a:bodyPr>
+          <a:lstStyle/>
+          <a:p>
+            <a:r>
+              <a:rPr sz="1000" b="0" dirty="0">
                 <a:solidFill>
                   <a:srgbClr val="555555"/>
                 </a:solidFill>
               </a:rPr>
               <a:t>Kickstarter Pre-Launch Recommender  ·  Omar Doughan</a:t>
             </a:r>
+            <a:r>
+              <a:rPr lang="en-US" sz="1000" b="0" dirty="0">
+                <a:solidFill>
+                  <a:srgbClr val="555555"/>
+                </a:solidFill>
+              </a:rPr>
+              <a:t> </a:t>
+            </a:r>
+            <a:r>
+              <a:rPr lang="en-US" sz="1000" dirty="0">
+                <a:solidFill>
+                  <a:srgbClr val="555555"/>
+                </a:solidFill>
+              </a:rPr>
+              <a:t> ·  Ryan Masri</a:t>
+            </a:r>
+            <a:endParaRPr sz="1000" b="0" dirty="0">
+              <a:solidFill>
+                <a:srgbClr val="555555"/>
+              </a:solidFill>
+            </a:endParaRPr>
           </a:p>
         </p:txBody>
       </p:sp>
@@ -4123,7 +4197,7 @@
 </file>
 
 <file path=ppt/slides/slide11.xml><?xml version="1.0" encoding="utf-8"?>
-<p:sld xmlns:a="http://schemas.openxmlformats.org/drawingml/2006/main" xmlns:p="http://schemas.openxmlformats.org/presentationml/2006/main" xmlns:r="http://schemas.openxmlformats.org/officeDocument/2006/relationships">
+<p:sld xmlns:a="http://schemas.openxmlformats.org/drawingml/2006/main" xmlns:r="http://schemas.openxmlformats.org/officeDocument/2006/relationships" xmlns:p="http://schemas.openxmlformats.org/presentationml/2006/main">
   <p:cSld>
     <p:spTree>
       <p:nvGrpSpPr>
@@ -4131,7 +4205,14 @@
         <p:cNvGrpSpPr/>
         <p:nvPr/>
       </p:nvGrpSpPr>
-      <p:grpSpPr/>
+      <p:grpSpPr>
+        <a:xfrm>
+          <a:off x="0" y="0"/>
+          <a:ext cx="0" cy="0"/>
+          <a:chOff x="0" y="0"/>
+          <a:chExt cx="0" cy="0"/>
+        </a:xfrm>
+      </p:grpSpPr>
       <p:sp>
         <p:nvSpPr>
           <p:cNvPr id="2" name="Rectangle 1"/>
@@ -4172,6 +4253,7 @@
           <a:lstStyle/>
           <a:p>
             <a:pPr algn="ctr"/>
+            <a:endParaRPr/>
           </a:p>
         </p:txBody>
       </p:sp>
@@ -4215,73 +4297,40 @@
           <a:lstStyle/>
           <a:p>
             <a:pPr algn="ctr"/>
-          </a:p>
-        </p:txBody>
-      </p:sp>
-      <p:sp>
-        <p:nvSpPr>
-          <p:cNvPr id="4" name="TextBox 3"/>
-          <p:cNvSpPr txBox="1"/>
-          <p:nvPr/>
-        </p:nvSpPr>
-        <p:spPr>
-          <a:xfrm>
-            <a:off x="365760" y="109728"/>
-            <a:ext cx="5486400" cy="365760"/>
-          </a:xfrm>
-          <a:prstGeom prst="rect">
-            <a:avLst/>
-          </a:prstGeom>
-          <a:noFill/>
-        </p:spPr>
-        <p:txBody>
-          <a:bodyPr wrap="square" lIns="45720" rIns="45720" tIns="18288" bIns="18288">
+            <a:endParaRPr/>
+          </a:p>
+        </p:txBody>
+      </p:sp>
+      <p:sp>
+        <p:nvSpPr>
+          <p:cNvPr id="5" name="TextBox 4"/>
+          <p:cNvSpPr txBox="1"/>
+          <p:nvPr/>
+        </p:nvSpPr>
+        <p:spPr>
+          <a:xfrm>
+            <a:off x="365760" y="777240"/>
+            <a:ext cx="11430000" cy="498598"/>
+          </a:xfrm>
+          <a:prstGeom prst="rect">
+            <a:avLst/>
+          </a:prstGeom>
+          <a:noFill/>
+        </p:spPr>
+        <p:txBody>
+          <a:bodyPr wrap="square" lIns="45720" tIns="18288" rIns="45720" bIns="18288">
             <a:spAutoFit/>
           </a:bodyPr>
           <a:lstStyle/>
           <a:p>
             <a:pPr algn="l"/>
             <a:r>
-              <a:rPr sz="1200" b="1">
-                <a:solidFill>
-                  <a:srgbClr val="FFFFFF"/>
-                </a:solidFill>
-              </a:rPr>
-              <a:t>PR4  ·  LIMITATIONS</a:t>
-            </a:r>
-          </a:p>
-        </p:txBody>
-      </p:sp>
-      <p:sp>
-        <p:nvSpPr>
-          <p:cNvPr id="5" name="TextBox 4"/>
-          <p:cNvSpPr txBox="1"/>
-          <p:nvPr/>
-        </p:nvSpPr>
-        <p:spPr>
-          <a:xfrm>
-            <a:off x="365760" y="777240"/>
-            <a:ext cx="11430000" cy="640080"/>
-          </a:xfrm>
-          <a:prstGeom prst="rect">
-            <a:avLst/>
-          </a:prstGeom>
-          <a:noFill/>
-        </p:spPr>
-        <p:txBody>
-          <a:bodyPr wrap="square" lIns="45720" rIns="45720" tIns="18288" bIns="18288">
-            <a:spAutoFit/>
-          </a:bodyPr>
-          <a:lstStyle/>
-          <a:p>
-            <a:pPr algn="l"/>
-            <a:r>
-              <a:rPr sz="3000" b="1">
+              <a:rPr lang="en-US" sz="3000" b="1" dirty="0">
                 <a:solidFill>
                   <a:srgbClr val="122A4F"/>
                 </a:solidFill>
               </a:rPr>
-              <a:t>What this tool is NOT</a:t>
+              <a:t>Limitations</a:t>
             </a:r>
           </a:p>
         </p:txBody>
@@ -4295,7 +4344,7 @@
         <p:spPr>
           <a:xfrm>
             <a:off x="548640" y="1737360"/>
-            <a:ext cx="11064240" cy="4572000"/>
+            <a:ext cx="11064240" cy="3170099"/>
           </a:xfrm>
           <a:prstGeom prst="rect">
             <a:avLst/>
@@ -4309,12 +4358,15 @@
           <a:lstStyle/>
           <a:p>
             <a:pPr algn="l">
+              <a:spcBef>
+                <a:spcPts val="800"/>
+              </a:spcBef>
               <a:spcAft>
                 <a:spcPts val="800"/>
               </a:spcAft>
             </a:pPr>
             <a:r>
-              <a:rPr sz="1700">
+              <a:rPr sz="2000" dirty="0">
                 <a:solidFill>
                   <a:srgbClr val="122A4F"/>
                 </a:solidFill>
@@ -4324,12 +4376,15 @@
           </a:p>
           <a:p>
             <a:pPr algn="l">
+              <a:spcBef>
+                <a:spcPts val="800"/>
+              </a:spcBef>
               <a:spcAft>
                 <a:spcPts val="800"/>
               </a:spcAft>
             </a:pPr>
             <a:r>
-              <a:rPr sz="1700">
+              <a:rPr sz="2000" dirty="0">
                 <a:solidFill>
                   <a:srgbClr val="122A4F"/>
                 </a:solidFill>
@@ -4339,12 +4394,15 @@
           </a:p>
           <a:p>
             <a:pPr algn="l">
+              <a:spcBef>
+                <a:spcPts val="800"/>
+              </a:spcBef>
               <a:spcAft>
                 <a:spcPts val="800"/>
               </a:spcAft>
             </a:pPr>
             <a:r>
-              <a:rPr sz="1700">
+              <a:rPr sz="2000" dirty="0">
                 <a:solidFill>
                   <a:srgbClr val="122A4F"/>
                 </a:solidFill>
@@ -4354,32 +4412,36 @@
           </a:p>
           <a:p>
             <a:pPr algn="l">
+              <a:spcBef>
+                <a:spcPts val="800"/>
+              </a:spcBef>
               <a:spcAft>
                 <a:spcPts val="800"/>
               </a:spcAft>
             </a:pPr>
             <a:r>
-              <a:rPr sz="1700">
+              <a:rPr sz="2000" dirty="0">
                 <a:solidFill>
                   <a:srgbClr val="122A4F"/>
                 </a:solidFill>
               </a:rPr>
-              <a:t>•  Deployed model is the tabular XGBoost (0.826 AUROC). The headline 0.868 number uses 596k features and is not in the demo.</a:t>
-            </a:r>
-          </a:p>
-          <a:p>
-            <a:pPr algn="l">
-              <a:spcAft>
-                <a:spcPts val="800"/>
-              </a:spcAft>
-            </a:pPr>
-            <a:r>
-              <a:rPr sz="1700">
+              <a:t>•  Deployed model is the tabular </a:t>
+            </a:r>
+            <a:r>
+              <a:rPr sz="2000" dirty="0" err="1">
                 <a:solidFill>
                   <a:srgbClr val="122A4F"/>
                 </a:solidFill>
               </a:rPr>
-              <a:t>•  Threshold tuning: balanced operating point at p = 0.64 (P = 0.85, R = 0.86). A different threshold is appropriate if false-positive cost ≠ false-negative cost.</a:t>
+              <a:t>XGBoost</a:t>
+            </a:r>
+            <a:r>
+              <a:rPr sz="2000" dirty="0">
+                <a:solidFill>
+                  <a:srgbClr val="122A4F"/>
+                </a:solidFill>
+              </a:rPr>
+              <a:t> (0.826 AUROC). The headline 0.868 number uses 596k features and is not in the demo.</a:t>
             </a:r>
           </a:p>
         </p:txBody>
@@ -4393,28 +4455,41 @@
         <p:spPr>
           <a:xfrm>
             <a:off x="10515600" y="6446520"/>
-            <a:ext cx="1554480" cy="274320"/>
-          </a:xfrm>
-          <a:prstGeom prst="rect">
-            <a:avLst/>
-          </a:prstGeom>
-          <a:noFill/>
-        </p:spPr>
-        <p:txBody>
-          <a:bodyPr wrap="square" lIns="45720" rIns="45720" tIns="18288" bIns="18288">
+            <a:ext cx="1554480" cy="190821"/>
+          </a:xfrm>
+          <a:prstGeom prst="rect">
+            <a:avLst/>
+          </a:prstGeom>
+          <a:noFill/>
+        </p:spPr>
+        <p:txBody>
+          <a:bodyPr wrap="square" lIns="45720" tIns="18288" rIns="45720" bIns="18288">
             <a:spAutoFit/>
           </a:bodyPr>
           <a:lstStyle/>
           <a:p>
             <a:pPr algn="r"/>
             <a:r>
-              <a:rPr sz="1000" b="0">
+              <a:rPr sz="1000" b="0" dirty="0">
                 <a:solidFill>
                   <a:srgbClr val="555555"/>
                 </a:solidFill>
               </a:rPr>
-              <a:t>11 / 12</a:t>
-            </a:r>
+              <a:t>11 / </a:t>
+            </a:r>
+            <a:r>
+              <a:rPr lang="en-US" sz="1000" b="0" dirty="0">
+                <a:solidFill>
+                  <a:srgbClr val="555555"/>
+                </a:solidFill>
+              </a:rPr>
+              <a:t>11</a:t>
+            </a:r>
+            <a:endParaRPr sz="1000" b="0" dirty="0">
+              <a:solidFill>
+                <a:srgbClr val="555555"/>
+              </a:solidFill>
+            </a:endParaRPr>
           </a:p>
         </p:txBody>
       </p:sp>
@@ -4427,428 +4502,48 @@
         <p:spPr>
           <a:xfrm>
             <a:off x="365760" y="6446520"/>
-            <a:ext cx="7315200" cy="274320"/>
-          </a:xfrm>
-          <a:prstGeom prst="rect">
-            <a:avLst/>
-          </a:prstGeom>
-          <a:noFill/>
-        </p:spPr>
-        <p:txBody>
-          <a:bodyPr wrap="square" lIns="45720" rIns="45720" tIns="18288" bIns="18288">
-            <a:spAutoFit/>
-          </a:bodyPr>
-          <a:lstStyle/>
-          <a:p>
-            <a:pPr algn="l"/>
-            <a:r>
-              <a:rPr sz="1000" b="0">
+            <a:ext cx="7315200" cy="190821"/>
+          </a:xfrm>
+          <a:prstGeom prst="rect">
+            <a:avLst/>
+          </a:prstGeom>
+          <a:noFill/>
+        </p:spPr>
+        <p:txBody>
+          <a:bodyPr wrap="square" lIns="45720" tIns="18288" rIns="45720" bIns="18288">
+            <a:spAutoFit/>
+          </a:bodyPr>
+          <a:lstStyle/>
+          <a:p>
+            <a:r>
+              <a:rPr sz="1000" b="0" dirty="0">
                 <a:solidFill>
                   <a:srgbClr val="555555"/>
                 </a:solidFill>
               </a:rPr>
               <a:t>Kickstarter Pre-Launch Recommender  ·  Omar Doughan</a:t>
             </a:r>
-          </a:p>
-        </p:txBody>
-      </p:sp>
-    </p:spTree>
-  </p:cSld>
-  <p:clrMapOvr>
-    <a:masterClrMapping/>
-  </p:clrMapOvr>
-</p:sld>
-</file>
-
-<file path=ppt/slides/slide12.xml><?xml version="1.0" encoding="utf-8"?>
-<p:sld xmlns:a="http://schemas.openxmlformats.org/drawingml/2006/main" xmlns:p="http://schemas.openxmlformats.org/presentationml/2006/main" xmlns:r="http://schemas.openxmlformats.org/officeDocument/2006/relationships">
-  <p:cSld>
-    <p:spTree>
-      <p:nvGrpSpPr>
-        <p:cNvPr id="1" name=""/>
-        <p:cNvGrpSpPr/>
-        <p:nvPr/>
-      </p:nvGrpSpPr>
-      <p:grpSpPr/>
-      <p:sp>
-        <p:nvSpPr>
-          <p:cNvPr id="2" name="Rectangle 1"/>
-          <p:cNvSpPr/>
-          <p:nvPr/>
-        </p:nvSpPr>
-        <p:spPr>
-          <a:xfrm>
-            <a:off x="0" y="0"/>
-            <a:ext cx="12191695" cy="6858000"/>
-          </a:xfrm>
-          <a:prstGeom prst="rect">
-            <a:avLst/>
-          </a:prstGeom>
-          <a:solidFill>
-            <a:srgbClr val="FFFFFF"/>
-          </a:solidFill>
-          <a:ln>
-            <a:noFill/>
-          </a:ln>
-        </p:spPr>
-        <p:style>
-          <a:lnRef idx="1">
-            <a:schemeClr val="accent1"/>
-          </a:lnRef>
-          <a:fillRef idx="3">
-            <a:schemeClr val="accent1"/>
-          </a:fillRef>
-          <a:effectRef idx="2">
-            <a:schemeClr val="accent1"/>
-          </a:effectRef>
-          <a:fontRef idx="minor">
-            <a:schemeClr val="lt1"/>
-          </a:fontRef>
-        </p:style>
-        <p:txBody>
-          <a:bodyPr rtlCol="0" anchor="ctr"/>
-          <a:lstStyle/>
-          <a:p>
-            <a:pPr algn="ctr"/>
-          </a:p>
-        </p:txBody>
-      </p:sp>
-      <p:sp>
-        <p:nvSpPr>
-          <p:cNvPr id="3" name="Rectangle 2"/>
-          <p:cNvSpPr/>
-          <p:nvPr/>
-        </p:nvSpPr>
-        <p:spPr>
-          <a:xfrm>
-            <a:off x="0" y="0"/>
-            <a:ext cx="12191695" cy="640080"/>
-          </a:xfrm>
-          <a:prstGeom prst="rect">
-            <a:avLst/>
-          </a:prstGeom>
-          <a:solidFill>
-            <a:srgbClr val="122A4F"/>
-          </a:solidFill>
-          <a:ln>
-            <a:noFill/>
-          </a:ln>
-        </p:spPr>
-        <p:style>
-          <a:lnRef idx="1">
-            <a:schemeClr val="accent1"/>
-          </a:lnRef>
-          <a:fillRef idx="3">
-            <a:schemeClr val="accent1"/>
-          </a:fillRef>
-          <a:effectRef idx="2">
-            <a:schemeClr val="accent1"/>
-          </a:effectRef>
-          <a:fontRef idx="minor">
-            <a:schemeClr val="lt1"/>
-          </a:fontRef>
-        </p:style>
-        <p:txBody>
-          <a:bodyPr rtlCol="0" anchor="ctr"/>
-          <a:lstStyle/>
-          <a:p>
-            <a:pPr algn="ctr"/>
-          </a:p>
-        </p:txBody>
-      </p:sp>
-      <p:sp>
-        <p:nvSpPr>
-          <p:cNvPr id="4" name="TextBox 3"/>
-          <p:cNvSpPr txBox="1"/>
-          <p:nvPr/>
-        </p:nvSpPr>
-        <p:spPr>
-          <a:xfrm>
-            <a:off x="365760" y="109728"/>
-            <a:ext cx="5486400" cy="365760"/>
-          </a:xfrm>
-          <a:prstGeom prst="rect">
-            <a:avLst/>
-          </a:prstGeom>
-          <a:noFill/>
-        </p:spPr>
-        <p:txBody>
-          <a:bodyPr wrap="square" lIns="45720" rIns="45720" tIns="18288" bIns="18288">
-            <a:spAutoFit/>
-          </a:bodyPr>
-          <a:lstStyle/>
-          <a:p>
-            <a:pPr algn="l"/>
-            <a:r>
-              <a:rPr sz="1200" b="1">
-                <a:solidFill>
-                  <a:srgbClr val="FFFFFF"/>
-                </a:solidFill>
-              </a:rPr>
-              <a:t>PR4  ·  WRAP</a:t>
-            </a:r>
-          </a:p>
-        </p:txBody>
-      </p:sp>
-      <p:sp>
-        <p:nvSpPr>
-          <p:cNvPr id="5" name="TextBox 4"/>
-          <p:cNvSpPr txBox="1"/>
-          <p:nvPr/>
-        </p:nvSpPr>
-        <p:spPr>
-          <a:xfrm>
-            <a:off x="365760" y="777240"/>
-            <a:ext cx="11430000" cy="640080"/>
-          </a:xfrm>
-          <a:prstGeom prst="rect">
-            <a:avLst/>
-          </a:prstGeom>
-          <a:noFill/>
-        </p:spPr>
-        <p:txBody>
-          <a:bodyPr wrap="square" lIns="45720" rIns="45720" tIns="18288" bIns="18288">
-            <a:spAutoFit/>
-          </a:bodyPr>
-          <a:lstStyle/>
-          <a:p>
-            <a:pPr algn="l"/>
-            <a:r>
-              <a:rPr sz="3000" b="1">
-                <a:solidFill>
-                  <a:srgbClr val="122A4F"/>
-                </a:solidFill>
-              </a:rPr>
-              <a:t>What I'd do next</a:t>
-            </a:r>
-          </a:p>
-        </p:txBody>
-      </p:sp>
-      <p:sp>
-        <p:nvSpPr>
-          <p:cNvPr id="6" name="TextBox 5"/>
-          <p:cNvSpPr txBox="1"/>
-          <p:nvPr/>
-        </p:nvSpPr>
-        <p:spPr>
-          <a:xfrm>
-            <a:off x="548640" y="1737360"/>
-            <a:ext cx="10972800" cy="3657600"/>
-          </a:xfrm>
-          <a:prstGeom prst="rect">
-            <a:avLst/>
-          </a:prstGeom>
-          <a:noFill/>
-        </p:spPr>
-        <p:txBody>
-          <a:bodyPr wrap="square">
-            <a:spAutoFit/>
-          </a:bodyPr>
-          <a:lstStyle/>
-          <a:p>
-            <a:pPr algn="l">
-              <a:spcAft>
-                <a:spcPts val="800"/>
-              </a:spcAft>
-            </a:pPr>
-            <a:r>
-              <a:rPr sz="1800">
-                <a:solidFill>
-                  <a:srgbClr val="122A4F"/>
-                </a:solidFill>
-              </a:rPr>
-              <a:t>•  Calibrate per-category. The 0.69–0.90 spread across categories means a single global threshold is the wrong call for some segments.</a:t>
-            </a:r>
-          </a:p>
-          <a:p>
-            <a:pPr algn="l">
-              <a:spcAft>
-                <a:spcPts val="800"/>
-              </a:spcAft>
-            </a:pPr>
-            <a:r>
-              <a:rPr sz="1800">
-                <a:solidFill>
-                  <a:srgbClr val="122A4F"/>
-                </a:solidFill>
-              </a:rPr>
-              <a:t>•  Re-test the Trends signal with a query-specific lookup, not a generic one — the current ablation may have under-powered it.</a:t>
-            </a:r>
-          </a:p>
-          <a:p>
-            <a:pPr algn="l">
-              <a:spcAft>
-                <a:spcPts val="800"/>
-              </a:spcAft>
-            </a:pPr>
-            <a:r>
-              <a:rPr sz="1800">
-                <a:solidFill>
-                  <a:srgbClr val="122A4F"/>
-                </a:solidFill>
-              </a:rPr>
-              <a:t>•  Causal layer: replace SHAP-based 'recommendations' with an uplift model trained on near-duplicate campaigns that differ only in one feature.</a:t>
-            </a:r>
-          </a:p>
-          <a:p>
-            <a:pPr algn="l">
-              <a:spcAft>
-                <a:spcPts val="800"/>
-              </a:spcAft>
-            </a:pPr>
-            <a:r>
-              <a:rPr sz="1800">
-                <a:solidFill>
-                  <a:srgbClr val="122A4F"/>
-                </a:solidFill>
-              </a:rPr>
-              <a:t>•  Productionise the retraining cadence — temporal drift implies a 12-month rebuild schedule at minimum.</a:t>
-            </a:r>
-          </a:p>
-        </p:txBody>
-      </p:sp>
-      <p:sp>
-        <p:nvSpPr>
-          <p:cNvPr id="7" name="Rectangle 6"/>
-          <p:cNvSpPr/>
-          <p:nvPr/>
-        </p:nvSpPr>
-        <p:spPr>
-          <a:xfrm>
-            <a:off x="548640" y="5486400"/>
-            <a:ext cx="11064240" cy="822960"/>
-          </a:xfrm>
-          <a:prstGeom prst="rect">
-            <a:avLst/>
-          </a:prstGeom>
-          <a:solidFill>
-            <a:srgbClr val="122A4F"/>
-          </a:solidFill>
-          <a:ln>
-            <a:noFill/>
-          </a:ln>
-        </p:spPr>
-        <p:style>
-          <a:lnRef idx="1">
-            <a:schemeClr val="accent1"/>
-          </a:lnRef>
-          <a:fillRef idx="3">
-            <a:schemeClr val="accent1"/>
-          </a:fillRef>
-          <a:effectRef idx="2">
-            <a:schemeClr val="accent1"/>
-          </a:effectRef>
-          <a:fontRef idx="minor">
-            <a:schemeClr val="lt1"/>
-          </a:fontRef>
-        </p:style>
-        <p:txBody>
-          <a:bodyPr rtlCol="0" anchor="ctr"/>
-          <a:lstStyle/>
-          <a:p>
-            <a:pPr algn="ctr"/>
-          </a:p>
-        </p:txBody>
-      </p:sp>
-      <p:sp>
-        <p:nvSpPr>
-          <p:cNvPr id="8" name="TextBox 7"/>
-          <p:cNvSpPr txBox="1"/>
-          <p:nvPr/>
-        </p:nvSpPr>
-        <p:spPr>
-          <a:xfrm>
-            <a:off x="548640" y="5623560"/>
-            <a:ext cx="11064240" cy="548640"/>
-          </a:xfrm>
-          <a:prstGeom prst="rect">
-            <a:avLst/>
-          </a:prstGeom>
-          <a:noFill/>
-        </p:spPr>
-        <p:txBody>
-          <a:bodyPr wrap="square" lIns="45720" rIns="45720" tIns="18288" bIns="18288">
-            <a:spAutoFit/>
-          </a:bodyPr>
-          <a:lstStyle/>
-          <a:p>
-            <a:pPr algn="ctr"/>
-            <a:r>
-              <a:rPr sz="2800" b="1">
-                <a:solidFill>
-                  <a:srgbClr val="FFFFFF"/>
-                </a:solidFill>
-              </a:rPr>
-              <a:t>Questions?</a:t>
-            </a:r>
-          </a:p>
-        </p:txBody>
-      </p:sp>
-      <p:sp>
-        <p:nvSpPr>
-          <p:cNvPr id="9" name="TextBox 8"/>
-          <p:cNvSpPr txBox="1"/>
-          <p:nvPr/>
-        </p:nvSpPr>
-        <p:spPr>
-          <a:xfrm>
-            <a:off x="10515600" y="6446520"/>
-            <a:ext cx="1554480" cy="274320"/>
-          </a:xfrm>
-          <a:prstGeom prst="rect">
-            <a:avLst/>
-          </a:prstGeom>
-          <a:noFill/>
-        </p:spPr>
-        <p:txBody>
-          <a:bodyPr wrap="square" lIns="45720" rIns="45720" tIns="18288" bIns="18288">
-            <a:spAutoFit/>
-          </a:bodyPr>
-          <a:lstStyle/>
-          <a:p>
-            <a:pPr algn="r"/>
-            <a:r>
-              <a:rPr sz="1000" b="0">
+            <a:r>
+              <a:rPr lang="en-US" sz="1000" b="0" dirty="0">
                 <a:solidFill>
                   <a:srgbClr val="555555"/>
                 </a:solidFill>
               </a:rPr>
-              <a:t>12 / 12</a:t>
-            </a:r>
-          </a:p>
-        </p:txBody>
-      </p:sp>
-      <p:sp>
-        <p:nvSpPr>
-          <p:cNvPr id="10" name="TextBox 9"/>
-          <p:cNvSpPr txBox="1"/>
-          <p:nvPr/>
-        </p:nvSpPr>
-        <p:spPr>
-          <a:xfrm>
-            <a:off x="365760" y="6446520"/>
-            <a:ext cx="7315200" cy="274320"/>
-          </a:xfrm>
-          <a:prstGeom prst="rect">
-            <a:avLst/>
-          </a:prstGeom>
-          <a:noFill/>
-        </p:spPr>
-        <p:txBody>
-          <a:bodyPr wrap="square" lIns="45720" rIns="45720" tIns="18288" bIns="18288">
-            <a:spAutoFit/>
-          </a:bodyPr>
-          <a:lstStyle/>
-          <a:p>
-            <a:pPr algn="l"/>
-            <a:r>
-              <a:rPr sz="1000" b="0">
+              <a:t> </a:t>
+            </a:r>
+            <a:r>
+              <a:rPr lang="en-US" sz="1000" dirty="0">
                 <a:solidFill>
                   <a:srgbClr val="555555"/>
                 </a:solidFill>
               </a:rPr>
-              <a:t>Kickstarter Pre-Launch Recommender  ·  Omar Doughan</a:t>
-            </a:r>
+              <a:t> ·  Ryan Masri</a:t>
+            </a:r>
+            <a:endParaRPr sz="1000" b="0" dirty="0">
+              <a:solidFill>
+                <a:srgbClr val="555555"/>
+              </a:solidFill>
+            </a:endParaRPr>
           </a:p>
         </p:txBody>
       </p:sp>
@@ -4861,7 +4556,7 @@
 </file>
 
 <file path=ppt/slides/slide2.xml><?xml version="1.0" encoding="utf-8"?>
-<p:sld xmlns:a="http://schemas.openxmlformats.org/drawingml/2006/main" xmlns:p="http://schemas.openxmlformats.org/presentationml/2006/main" xmlns:r="http://schemas.openxmlformats.org/officeDocument/2006/relationships">
+<p:sld xmlns:a="http://schemas.openxmlformats.org/drawingml/2006/main" xmlns:r="http://schemas.openxmlformats.org/officeDocument/2006/relationships" xmlns:p="http://schemas.openxmlformats.org/presentationml/2006/main">
   <p:cSld>
     <p:spTree>
       <p:nvGrpSpPr>
@@ -4869,7 +4564,14 @@
         <p:cNvGrpSpPr/>
         <p:nvPr/>
       </p:nvGrpSpPr>
-      <p:grpSpPr/>
+      <p:grpSpPr>
+        <a:xfrm>
+          <a:off x="0" y="0"/>
+          <a:ext cx="0" cy="0"/>
+          <a:chOff x="0" y="0"/>
+          <a:chExt cx="0" cy="0"/>
+        </a:xfrm>
+      </p:grpSpPr>
       <p:sp>
         <p:nvSpPr>
           <p:cNvPr id="2" name="Rectangle 1"/>
@@ -4910,6 +4612,7 @@
           <a:lstStyle/>
           <a:p>
             <a:pPr algn="ctr"/>
+            <a:endParaRPr/>
           </a:p>
         </p:txBody>
       </p:sp>
@@ -4953,40 +4656,7 @@
           <a:lstStyle/>
           <a:p>
             <a:pPr algn="ctr"/>
-          </a:p>
-        </p:txBody>
-      </p:sp>
-      <p:sp>
-        <p:nvSpPr>
-          <p:cNvPr id="4" name="TextBox 3"/>
-          <p:cNvSpPr txBox="1"/>
-          <p:nvPr/>
-        </p:nvSpPr>
-        <p:spPr>
-          <a:xfrm>
-            <a:off x="365760" y="109728"/>
-            <a:ext cx="5486400" cy="365760"/>
-          </a:xfrm>
-          <a:prstGeom prst="rect">
-            <a:avLst/>
-          </a:prstGeom>
-          <a:noFill/>
-        </p:spPr>
-        <p:txBody>
-          <a:bodyPr wrap="square" lIns="45720" rIns="45720" tIns="18288" bIns="18288">
-            <a:spAutoFit/>
-          </a:bodyPr>
-          <a:lstStyle/>
-          <a:p>
-            <a:pPr algn="l"/>
-            <a:r>
-              <a:rPr sz="1200" b="1">
-                <a:solidFill>
-                  <a:srgbClr val="FFFFFF"/>
-                </a:solidFill>
-              </a:rPr>
-              <a:t>PR1  ·  PROBLEM</a:t>
-            </a:r>
+            <a:endParaRPr/>
           </a:p>
         </p:txBody>
       </p:sp>
@@ -5007,7 +4677,7 @@
           <a:noFill/>
         </p:spPr>
         <p:txBody>
-          <a:bodyPr wrap="square" lIns="45720" rIns="45720" tIns="18288" bIns="18288">
+          <a:bodyPr wrap="square" lIns="45720" tIns="18288" rIns="45720" bIns="18288">
             <a:spAutoFit/>
           </a:bodyPr>
           <a:lstStyle/>
@@ -5033,7 +4703,7 @@
         <p:spPr>
           <a:xfrm>
             <a:off x="548640" y="1737360"/>
-            <a:ext cx="10972800" cy="4114800"/>
+            <a:ext cx="10972800" cy="2554545"/>
           </a:xfrm>
           <a:prstGeom prst="rect">
             <a:avLst/>
@@ -5047,12 +4717,15 @@
           <a:lstStyle/>
           <a:p>
             <a:pPr algn="l">
+              <a:spcBef>
+                <a:spcPts val="800"/>
+              </a:spcBef>
               <a:spcAft>
                 <a:spcPts val="800"/>
               </a:spcAft>
             </a:pPr>
             <a:r>
-              <a:rPr sz="2000">
+              <a:rPr sz="2000" dirty="0">
                 <a:solidFill>
                   <a:srgbClr val="122A4F"/>
                 </a:solidFill>
@@ -5062,12 +4735,15 @@
           </a:p>
           <a:p>
             <a:pPr algn="l">
+              <a:spcBef>
+                <a:spcPts val="800"/>
+              </a:spcBef>
               <a:spcAft>
                 <a:spcPts val="800"/>
               </a:spcAft>
             </a:pPr>
             <a:r>
-              <a:rPr sz="2000">
+              <a:rPr sz="2000" dirty="0">
                 <a:solidFill>
                   <a:srgbClr val="122A4F"/>
                 </a:solidFill>
@@ -5077,12 +4753,15 @@
           </a:p>
           <a:p>
             <a:pPr algn="l">
+              <a:spcBef>
+                <a:spcPts val="800"/>
+              </a:spcBef>
               <a:spcAft>
                 <a:spcPts val="800"/>
               </a:spcAft>
             </a:pPr>
             <a:r>
-              <a:rPr sz="2000">
+              <a:rPr sz="2000" dirty="0">
                 <a:solidFill>
                   <a:srgbClr val="122A4F"/>
                 </a:solidFill>
@@ -5092,12 +4771,15 @@
           </a:p>
           <a:p>
             <a:pPr algn="l">
+              <a:spcBef>
+                <a:spcPts val="800"/>
+              </a:spcBef>
               <a:spcAft>
                 <a:spcPts val="800"/>
               </a:spcAft>
             </a:pPr>
             <a:r>
-              <a:rPr sz="2000">
+              <a:rPr sz="2000" dirty="0">
                 <a:solidFill>
                   <a:srgbClr val="122A4F"/>
                 </a:solidFill>
@@ -5116,28 +4798,41 @@
         <p:spPr>
           <a:xfrm>
             <a:off x="10515600" y="6446520"/>
-            <a:ext cx="1554480" cy="274320"/>
-          </a:xfrm>
-          <a:prstGeom prst="rect">
-            <a:avLst/>
-          </a:prstGeom>
-          <a:noFill/>
-        </p:spPr>
-        <p:txBody>
-          <a:bodyPr wrap="square" lIns="45720" rIns="45720" tIns="18288" bIns="18288">
+            <a:ext cx="1554480" cy="190821"/>
+          </a:xfrm>
+          <a:prstGeom prst="rect">
+            <a:avLst/>
+          </a:prstGeom>
+          <a:noFill/>
+        </p:spPr>
+        <p:txBody>
+          <a:bodyPr wrap="square" lIns="45720" tIns="18288" rIns="45720" bIns="18288">
             <a:spAutoFit/>
           </a:bodyPr>
           <a:lstStyle/>
           <a:p>
             <a:pPr algn="r"/>
             <a:r>
-              <a:rPr sz="1000" b="0">
+              <a:rPr sz="1000" b="0" dirty="0">
                 <a:solidFill>
                   <a:srgbClr val="555555"/>
                 </a:solidFill>
               </a:rPr>
-              <a:t>2 / 12</a:t>
-            </a:r>
+              <a:t>2 / </a:t>
+            </a:r>
+            <a:r>
+              <a:rPr lang="en-US" sz="1000" b="0" dirty="0">
+                <a:solidFill>
+                  <a:srgbClr val="555555"/>
+                </a:solidFill>
+              </a:rPr>
+              <a:t>11</a:t>
+            </a:r>
+            <a:endParaRPr sz="1000" b="0" dirty="0">
+              <a:solidFill>
+                <a:srgbClr val="555555"/>
+              </a:solidFill>
+            </a:endParaRPr>
           </a:p>
         </p:txBody>
       </p:sp>
@@ -5150,28 +4845,48 @@
         <p:spPr>
           <a:xfrm>
             <a:off x="365760" y="6446520"/>
-            <a:ext cx="7315200" cy="274320"/>
-          </a:xfrm>
-          <a:prstGeom prst="rect">
-            <a:avLst/>
-          </a:prstGeom>
-          <a:noFill/>
-        </p:spPr>
-        <p:txBody>
-          <a:bodyPr wrap="square" lIns="45720" rIns="45720" tIns="18288" bIns="18288">
-            <a:spAutoFit/>
-          </a:bodyPr>
-          <a:lstStyle/>
-          <a:p>
-            <a:pPr algn="l"/>
-            <a:r>
-              <a:rPr sz="1000" b="0">
+            <a:ext cx="7315200" cy="190821"/>
+          </a:xfrm>
+          <a:prstGeom prst="rect">
+            <a:avLst/>
+          </a:prstGeom>
+          <a:noFill/>
+        </p:spPr>
+        <p:txBody>
+          <a:bodyPr wrap="square" lIns="45720" tIns="18288" rIns="45720" bIns="18288">
+            <a:spAutoFit/>
+          </a:bodyPr>
+          <a:lstStyle/>
+          <a:p>
+            <a:r>
+              <a:rPr sz="1000" b="0" dirty="0">
                 <a:solidFill>
                   <a:srgbClr val="555555"/>
                 </a:solidFill>
               </a:rPr>
               <a:t>Kickstarter Pre-Launch Recommender  ·  Omar Doughan</a:t>
             </a:r>
+            <a:r>
+              <a:rPr lang="en-US" sz="1000" b="0" dirty="0">
+                <a:solidFill>
+                  <a:srgbClr val="555555"/>
+                </a:solidFill>
+              </a:rPr>
+              <a:t> </a:t>
+            </a:r>
+            <a:r>
+              <a:rPr lang="en-US" sz="1000" dirty="0">
+                <a:solidFill>
+                  <a:srgbClr val="555555"/>
+                </a:solidFill>
+              </a:rPr>
+              <a:t> ·  Ryan Masri</a:t>
+            </a:r>
+            <a:endParaRPr sz="1000" b="0" dirty="0">
+              <a:solidFill>
+                <a:srgbClr val="555555"/>
+              </a:solidFill>
+            </a:endParaRPr>
           </a:p>
         </p:txBody>
       </p:sp>
@@ -5184,7 +4899,7 @@
 </file>
 
 <file path=ppt/slides/slide3.xml><?xml version="1.0" encoding="utf-8"?>
-<p:sld xmlns:a="http://schemas.openxmlformats.org/drawingml/2006/main" xmlns:p="http://schemas.openxmlformats.org/presentationml/2006/main" xmlns:r="http://schemas.openxmlformats.org/officeDocument/2006/relationships">
+<p:sld xmlns:a="http://schemas.openxmlformats.org/drawingml/2006/main" xmlns:r="http://schemas.openxmlformats.org/officeDocument/2006/relationships" xmlns:p="http://schemas.openxmlformats.org/presentationml/2006/main">
   <p:cSld>
     <p:spTree>
       <p:nvGrpSpPr>
@@ -5192,7 +4907,14 @@
         <p:cNvGrpSpPr/>
         <p:nvPr/>
       </p:nvGrpSpPr>
-      <p:grpSpPr/>
+      <p:grpSpPr>
+        <a:xfrm>
+          <a:off x="0" y="0"/>
+          <a:ext cx="0" cy="0"/>
+          <a:chOff x="0" y="0"/>
+          <a:chExt cx="0" cy="0"/>
+        </a:xfrm>
+      </p:grpSpPr>
       <p:sp>
         <p:nvSpPr>
           <p:cNvPr id="2" name="Rectangle 1"/>
@@ -5233,6 +4955,7 @@
           <a:lstStyle/>
           <a:p>
             <a:pPr algn="ctr"/>
+            <a:endParaRPr/>
           </a:p>
         </p:txBody>
       </p:sp>
@@ -5276,40 +4999,7 @@
           <a:lstStyle/>
           <a:p>
             <a:pPr algn="ctr"/>
-          </a:p>
-        </p:txBody>
-      </p:sp>
-      <p:sp>
-        <p:nvSpPr>
-          <p:cNvPr id="4" name="TextBox 3"/>
-          <p:cNvSpPr txBox="1"/>
-          <p:nvPr/>
-        </p:nvSpPr>
-        <p:spPr>
-          <a:xfrm>
-            <a:off x="365760" y="109728"/>
-            <a:ext cx="5486400" cy="365760"/>
-          </a:xfrm>
-          <a:prstGeom prst="rect">
-            <a:avLst/>
-          </a:prstGeom>
-          <a:noFill/>
-        </p:spPr>
-        <p:txBody>
-          <a:bodyPr wrap="square" lIns="45720" rIns="45720" tIns="18288" bIns="18288">
-            <a:spAutoFit/>
-          </a:bodyPr>
-          <a:lstStyle/>
-          <a:p>
-            <a:pPr algn="l"/>
-            <a:r>
-              <a:rPr sz="1200" b="1">
-                <a:solidFill>
-                  <a:srgbClr val="FFFFFF"/>
-                </a:solidFill>
-              </a:rPr>
-              <a:t>PR2  ·  DATA</a:t>
-            </a:r>
+            <a:endParaRPr/>
           </a:p>
         </p:txBody>
       </p:sp>
@@ -5330,7 +5020,7 @@
           <a:noFill/>
         </p:spPr>
         <p:txBody>
-          <a:bodyPr wrap="square" lIns="45720" rIns="45720" tIns="18288" bIns="18288">
+          <a:bodyPr wrap="square" lIns="45720" tIns="18288" rIns="45720" bIns="18288">
             <a:spAutoFit/>
           </a:bodyPr>
           <a:lstStyle/>
@@ -5389,6 +5079,7 @@
           <a:lstStyle/>
           <a:p>
             <a:pPr algn="ctr"/>
+            <a:endParaRPr/>
           </a:p>
         </p:txBody>
       </p:sp>
@@ -5409,7 +5100,7 @@
           <a:noFill/>
         </p:spPr>
         <p:txBody>
-          <a:bodyPr wrap="square" lIns="45720" rIns="45720" tIns="18288" bIns="18288">
+          <a:bodyPr wrap="square" lIns="45720" tIns="18288" rIns="45720" bIns="18288">
             <a:spAutoFit/>
           </a:bodyPr>
           <a:lstStyle/>
@@ -5443,7 +5134,7 @@
           <a:noFill/>
         </p:spPr>
         <p:txBody>
-          <a:bodyPr wrap="square" lIns="45720" rIns="45720" tIns="18288" bIns="18288">
+          <a:bodyPr wrap="square" lIns="45720" tIns="18288" rIns="45720" bIns="18288">
             <a:spAutoFit/>
           </a:bodyPr>
           <a:lstStyle/>
@@ -5502,6 +5193,7 @@
           <a:lstStyle/>
           <a:p>
             <a:pPr algn="ctr"/>
+            <a:endParaRPr/>
           </a:p>
         </p:txBody>
       </p:sp>
@@ -5522,7 +5214,7 @@
           <a:noFill/>
         </p:spPr>
         <p:txBody>
-          <a:bodyPr wrap="square" lIns="45720" rIns="45720" tIns="18288" bIns="18288">
+          <a:bodyPr wrap="square" lIns="45720" tIns="18288" rIns="45720" bIns="18288">
             <a:spAutoFit/>
           </a:bodyPr>
           <a:lstStyle/>
@@ -5556,7 +5248,7 @@
           <a:noFill/>
         </p:spPr>
         <p:txBody>
-          <a:bodyPr wrap="square" lIns="45720" rIns="45720" tIns="18288" bIns="18288">
+          <a:bodyPr wrap="square" lIns="45720" tIns="18288" rIns="45720" bIns="18288">
             <a:spAutoFit/>
           </a:bodyPr>
           <a:lstStyle/>
@@ -5615,6 +5307,7 @@
           <a:lstStyle/>
           <a:p>
             <a:pPr algn="ctr"/>
+            <a:endParaRPr/>
           </a:p>
         </p:txBody>
       </p:sp>
@@ -5635,7 +5328,7 @@
           <a:noFill/>
         </p:spPr>
         <p:txBody>
-          <a:bodyPr wrap="square" lIns="45720" rIns="45720" tIns="18288" bIns="18288">
+          <a:bodyPr wrap="square" lIns="45720" tIns="18288" rIns="45720" bIns="18288">
             <a:spAutoFit/>
           </a:bodyPr>
           <a:lstStyle/>
@@ -5669,7 +5362,7 @@
           <a:noFill/>
         </p:spPr>
         <p:txBody>
-          <a:bodyPr wrap="square" lIns="45720" rIns="45720" tIns="18288" bIns="18288">
+          <a:bodyPr wrap="square" lIns="45720" tIns="18288" rIns="45720" bIns="18288">
             <a:spAutoFit/>
           </a:bodyPr>
           <a:lstStyle/>
@@ -5728,6 +5421,7 @@
           <a:lstStyle/>
           <a:p>
             <a:pPr algn="ctr"/>
+            <a:endParaRPr/>
           </a:p>
         </p:txBody>
       </p:sp>
@@ -5748,7 +5442,7 @@
           <a:noFill/>
         </p:spPr>
         <p:txBody>
-          <a:bodyPr wrap="square" lIns="45720" rIns="45720" tIns="18288" bIns="18288">
+          <a:bodyPr wrap="square" lIns="45720" tIns="18288" rIns="45720" bIns="18288">
             <a:spAutoFit/>
           </a:bodyPr>
           <a:lstStyle/>
@@ -5782,7 +5476,7 @@
           <a:noFill/>
         </p:spPr>
         <p:txBody>
-          <a:bodyPr wrap="square" lIns="45720" rIns="45720" tIns="18288" bIns="18288">
+          <a:bodyPr wrap="square" lIns="45720" tIns="18288" rIns="45720" bIns="18288">
             <a:spAutoFit/>
           </a:bodyPr>
           <a:lstStyle/>
@@ -5808,27 +5502,59 @@
         <p:spPr>
           <a:xfrm>
             <a:off x="548640" y="3383280"/>
-            <a:ext cx="10972800" cy="457200"/>
-          </a:xfrm>
-          <a:prstGeom prst="rect">
-            <a:avLst/>
-          </a:prstGeom>
-          <a:noFill/>
-        </p:spPr>
-        <p:txBody>
-          <a:bodyPr wrap="square" lIns="45720" rIns="45720" tIns="18288" bIns="18288">
+            <a:ext cx="10972800" cy="252377"/>
+          </a:xfrm>
+          <a:prstGeom prst="rect">
+            <a:avLst/>
+          </a:prstGeom>
+          <a:noFill/>
+        </p:spPr>
+        <p:txBody>
+          <a:bodyPr wrap="square" lIns="45720" tIns="18288" rIns="45720" bIns="18288">
             <a:spAutoFit/>
           </a:bodyPr>
           <a:lstStyle/>
           <a:p>
             <a:pPr algn="l"/>
             <a:r>
-              <a:rPr sz="1400" b="0">
+              <a:rPr sz="1400" b="0" dirty="0">
                 <a:solidFill>
                   <a:srgbClr val="555555"/>
                 </a:solidFill>
               </a:rPr>
-              <a:t>Source: WebRobots monthly Kickstarter scrapes (2009 – early 2026)</a:t>
+              <a:t>Source: </a:t>
+            </a:r>
+            <a:r>
+              <a:rPr sz="1400" b="0" dirty="0" err="1">
+                <a:solidFill>
+                  <a:srgbClr val="555555"/>
+                </a:solidFill>
+              </a:rPr>
+              <a:t>WebRobots</a:t>
+            </a:r>
+            <a:r>
+              <a:rPr sz="1400" b="0" dirty="0">
+                <a:solidFill>
+                  <a:srgbClr val="555555"/>
+                </a:solidFill>
+              </a:rPr>
+              <a:t> monthly Kickstarter scrapes (2009 –</a:t>
+            </a:r>
+            <a:r>
+              <a:rPr lang="en-US" sz="1400" b="0" dirty="0">
+                <a:solidFill>
+                  <a:srgbClr val="555555"/>
+                </a:solidFill>
+              </a:rPr>
+              <a:t> </a:t>
+            </a:r>
+            <a:r>
+              <a:rPr sz="1400" b="0" dirty="0">
+                <a:solidFill>
+                  <a:srgbClr val="555555"/>
+                </a:solidFill>
+              </a:rPr>
+              <a:t>2026)</a:t>
             </a:r>
           </a:p>
         </p:txBody>
@@ -5842,7 +5568,7 @@
         <p:spPr>
           <a:xfrm>
             <a:off x="548640" y="4023360"/>
-            <a:ext cx="10972800" cy="2560320"/>
+            <a:ext cx="10972800" cy="1528624"/>
           </a:xfrm>
           <a:prstGeom prst="rect">
             <a:avLst/>
@@ -5861,7 +5587,7 @@
               </a:spcAft>
             </a:pPr>
             <a:r>
-              <a:rPr sz="1800">
+              <a:rPr sz="2000" dirty="0">
                 <a:solidFill>
                   <a:srgbClr val="122A4F"/>
                 </a:solidFill>
@@ -5876,7 +5602,7 @@
               </a:spcAft>
             </a:pPr>
             <a:r>
-              <a:rPr sz="1800">
+              <a:rPr sz="2000" dirty="0">
                 <a:solidFill>
                   <a:srgbClr val="122A4F"/>
                 </a:solidFill>
@@ -5891,12 +5617,28 @@
               </a:spcAft>
             </a:pPr>
             <a:r>
-              <a:rPr sz="1800">
+              <a:rPr sz="2000" dirty="0">
                 <a:solidFill>
                   <a:srgbClr val="122A4F"/>
                 </a:solidFill>
               </a:rPr>
-              <a:t>•  Text block (596,062 dims): word + character TF-IDF on the project blurb.</a:t>
+              <a:t>•  Text block (596,062 dims): word + character TF-IDF on the</a:t>
+            </a:r>
+            <a:r>
+              <a:rPr lang="en-US" sz="2000" dirty="0">
+                <a:solidFill>
+                  <a:srgbClr val="122A4F"/>
+                </a:solidFill>
+              </a:rPr>
+              <a:t> campaign title + </a:t>
+            </a:r>
+            <a:r>
+              <a:rPr sz="2000" dirty="0">
+                <a:solidFill>
+                  <a:srgbClr val="122A4F"/>
+                </a:solidFill>
+              </a:rPr>
+              <a:t>blurb.</a:t>
             </a:r>
           </a:p>
         </p:txBody>
@@ -5910,28 +5652,41 @@
         <p:spPr>
           <a:xfrm>
             <a:off x="10515600" y="6446520"/>
-            <a:ext cx="1554480" cy="274320"/>
-          </a:xfrm>
-          <a:prstGeom prst="rect">
-            <a:avLst/>
-          </a:prstGeom>
-          <a:noFill/>
-        </p:spPr>
-        <p:txBody>
-          <a:bodyPr wrap="square" lIns="45720" rIns="45720" tIns="18288" bIns="18288">
+            <a:ext cx="1554480" cy="190821"/>
+          </a:xfrm>
+          <a:prstGeom prst="rect">
+            <a:avLst/>
+          </a:prstGeom>
+          <a:noFill/>
+        </p:spPr>
+        <p:txBody>
+          <a:bodyPr wrap="square" lIns="45720" tIns="18288" rIns="45720" bIns="18288">
             <a:spAutoFit/>
           </a:bodyPr>
           <a:lstStyle/>
           <a:p>
             <a:pPr algn="r"/>
             <a:r>
-              <a:rPr sz="1000" b="0">
+              <a:rPr sz="1000" b="0" dirty="0">
                 <a:solidFill>
                   <a:srgbClr val="555555"/>
                 </a:solidFill>
               </a:rPr>
-              <a:t>3 / 12</a:t>
-            </a:r>
+              <a:t>3 / </a:t>
+            </a:r>
+            <a:r>
+              <a:rPr lang="en-US" sz="1000" b="0" dirty="0">
+                <a:solidFill>
+                  <a:srgbClr val="555555"/>
+                </a:solidFill>
+              </a:rPr>
+              <a:t>11</a:t>
+            </a:r>
+            <a:endParaRPr sz="1000" b="0" dirty="0">
+              <a:solidFill>
+                <a:srgbClr val="555555"/>
+              </a:solidFill>
+            </a:endParaRPr>
           </a:p>
         </p:txBody>
       </p:sp>
@@ -5944,28 +5699,48 @@
         <p:spPr>
           <a:xfrm>
             <a:off x="365760" y="6446520"/>
-            <a:ext cx="7315200" cy="274320"/>
-          </a:xfrm>
-          <a:prstGeom prst="rect">
-            <a:avLst/>
-          </a:prstGeom>
-          <a:noFill/>
-        </p:spPr>
-        <p:txBody>
-          <a:bodyPr wrap="square" lIns="45720" rIns="45720" tIns="18288" bIns="18288">
-            <a:spAutoFit/>
-          </a:bodyPr>
-          <a:lstStyle/>
-          <a:p>
-            <a:pPr algn="l"/>
-            <a:r>
-              <a:rPr sz="1000" b="0">
+            <a:ext cx="7315200" cy="190821"/>
+          </a:xfrm>
+          <a:prstGeom prst="rect">
+            <a:avLst/>
+          </a:prstGeom>
+          <a:noFill/>
+        </p:spPr>
+        <p:txBody>
+          <a:bodyPr wrap="square" lIns="45720" tIns="18288" rIns="45720" bIns="18288">
+            <a:spAutoFit/>
+          </a:bodyPr>
+          <a:lstStyle/>
+          <a:p>
+            <a:r>
+              <a:rPr sz="1000" b="0" dirty="0">
                 <a:solidFill>
                   <a:srgbClr val="555555"/>
                 </a:solidFill>
               </a:rPr>
               <a:t>Kickstarter Pre-Launch Recommender  ·  Omar Doughan</a:t>
             </a:r>
+            <a:r>
+              <a:rPr lang="en-US" sz="1000" b="0" dirty="0">
+                <a:solidFill>
+                  <a:srgbClr val="555555"/>
+                </a:solidFill>
+              </a:rPr>
+              <a:t> </a:t>
+            </a:r>
+            <a:r>
+              <a:rPr lang="en-US" sz="1000" dirty="0">
+                <a:solidFill>
+                  <a:srgbClr val="555555"/>
+                </a:solidFill>
+              </a:rPr>
+              <a:t> ·  Ryan Masri</a:t>
+            </a:r>
+            <a:endParaRPr sz="1000" b="0" dirty="0">
+              <a:solidFill>
+                <a:srgbClr val="555555"/>
+              </a:solidFill>
+            </a:endParaRPr>
           </a:p>
         </p:txBody>
       </p:sp>
@@ -5978,7 +5753,7 @@
 </file>
 
 <file path=ppt/slides/slide4.xml><?xml version="1.0" encoding="utf-8"?>
-<p:sld xmlns:a="http://schemas.openxmlformats.org/drawingml/2006/main" xmlns:p="http://schemas.openxmlformats.org/presentationml/2006/main" xmlns:r="http://schemas.openxmlformats.org/officeDocument/2006/relationships">
+<p:sld xmlns:a="http://schemas.openxmlformats.org/drawingml/2006/main" xmlns:r="http://schemas.openxmlformats.org/officeDocument/2006/relationships" xmlns:p="http://schemas.openxmlformats.org/presentationml/2006/main">
   <p:cSld>
     <p:spTree>
       <p:nvGrpSpPr>
@@ -5986,7 +5761,14 @@
         <p:cNvGrpSpPr/>
         <p:nvPr/>
       </p:nvGrpSpPr>
-      <p:grpSpPr/>
+      <p:grpSpPr>
+        <a:xfrm>
+          <a:off x="0" y="0"/>
+          <a:ext cx="0" cy="0"/>
+          <a:chOff x="0" y="0"/>
+          <a:chExt cx="0" cy="0"/>
+        </a:xfrm>
+      </p:grpSpPr>
       <p:sp>
         <p:nvSpPr>
           <p:cNvPr id="2" name="Rectangle 1"/>
@@ -6027,6 +5809,7 @@
           <a:lstStyle/>
           <a:p>
             <a:pPr algn="ctr"/>
+            <a:endParaRPr/>
           </a:p>
         </p:txBody>
       </p:sp>
@@ -6070,40 +5853,7 @@
           <a:lstStyle/>
           <a:p>
             <a:pPr algn="ctr"/>
-          </a:p>
-        </p:txBody>
-      </p:sp>
-      <p:sp>
-        <p:nvSpPr>
-          <p:cNvPr id="4" name="TextBox 3"/>
-          <p:cNvSpPr txBox="1"/>
-          <p:nvPr/>
-        </p:nvSpPr>
-        <p:spPr>
-          <a:xfrm>
-            <a:off x="365760" y="109728"/>
-            <a:ext cx="5486400" cy="365760"/>
-          </a:xfrm>
-          <a:prstGeom prst="rect">
-            <a:avLst/>
-          </a:prstGeom>
-          <a:noFill/>
-        </p:spPr>
-        <p:txBody>
-          <a:bodyPr wrap="square" lIns="45720" rIns="45720" tIns="18288" bIns="18288">
-            <a:spAutoFit/>
-          </a:bodyPr>
-          <a:lstStyle/>
-          <a:p>
-            <a:pPr algn="l"/>
-            <a:r>
-              <a:rPr sz="1200" b="1">
-                <a:solidFill>
-                  <a:srgbClr val="FFFFFF"/>
-                </a:solidFill>
-              </a:rPr>
-              <a:t>PR2  ·  METHOD</a:t>
-            </a:r>
+            <a:endParaRPr/>
           </a:p>
         </p:txBody>
       </p:sp>
@@ -6124,7 +5874,7 @@
           <a:noFill/>
         </p:spPr>
         <p:txBody>
-          <a:bodyPr wrap="square" lIns="45720" rIns="45720" tIns="18288" bIns="18288">
+          <a:bodyPr wrap="square" lIns="45720" tIns="18288" rIns="45720" bIns="18288">
             <a:spAutoFit/>
           </a:bodyPr>
           <a:lstStyle/>
@@ -6183,6 +5933,7 @@
           <a:lstStyle/>
           <a:p>
             <a:pPr algn="ctr"/>
+            <a:endParaRPr/>
           </a:p>
         </p:txBody>
       </p:sp>
@@ -6203,7 +5954,7 @@
           <a:noFill/>
         </p:spPr>
         <p:txBody>
-          <a:bodyPr wrap="square" lIns="45720" rIns="45720" tIns="18288" bIns="18288">
+          <a:bodyPr wrap="square" lIns="45720" tIns="18288" rIns="45720" bIns="18288">
             <a:spAutoFit/>
           </a:bodyPr>
           <a:lstStyle/>
@@ -6237,7 +5988,7 @@
           <a:noFill/>
         </p:spPr>
         <p:txBody>
-          <a:bodyPr wrap="square" lIns="45720" rIns="45720" tIns="18288" bIns="18288">
+          <a:bodyPr wrap="square" lIns="45720" tIns="18288" rIns="45720" bIns="18288">
             <a:spAutoFit/>
           </a:bodyPr>
           <a:lstStyle/>
@@ -6282,7 +6033,7 @@
           <a:noFill/>
         </p:spPr>
         <p:txBody>
-          <a:bodyPr wrap="square" lIns="45720" rIns="45720" tIns="18288" bIns="18288">
+          <a:bodyPr wrap="square" lIns="45720" tIns="18288" rIns="45720" bIns="18288">
             <a:spAutoFit/>
           </a:bodyPr>
           <a:lstStyle/>
@@ -6376,28 +6127,41 @@
         <p:spPr>
           <a:xfrm>
             <a:off x="10515600" y="6446520"/>
-            <a:ext cx="1554480" cy="274320"/>
-          </a:xfrm>
-          <a:prstGeom prst="rect">
-            <a:avLst/>
-          </a:prstGeom>
-          <a:noFill/>
-        </p:spPr>
-        <p:txBody>
-          <a:bodyPr wrap="square" lIns="45720" rIns="45720" tIns="18288" bIns="18288">
+            <a:ext cx="1554480" cy="190821"/>
+          </a:xfrm>
+          <a:prstGeom prst="rect">
+            <a:avLst/>
+          </a:prstGeom>
+          <a:noFill/>
+        </p:spPr>
+        <p:txBody>
+          <a:bodyPr wrap="square" lIns="45720" tIns="18288" rIns="45720" bIns="18288">
             <a:spAutoFit/>
           </a:bodyPr>
           <a:lstStyle/>
           <a:p>
             <a:pPr algn="r"/>
             <a:r>
-              <a:rPr sz="1000" b="0">
+              <a:rPr sz="1000" b="0" dirty="0">
                 <a:solidFill>
                   <a:srgbClr val="555555"/>
                 </a:solidFill>
               </a:rPr>
-              <a:t>4 / 12</a:t>
-            </a:r>
+              <a:t>4 / </a:t>
+            </a:r>
+            <a:r>
+              <a:rPr lang="en-US" sz="1000" b="0" dirty="0">
+                <a:solidFill>
+                  <a:srgbClr val="555555"/>
+                </a:solidFill>
+              </a:rPr>
+              <a:t>11</a:t>
+            </a:r>
+            <a:endParaRPr sz="1000" b="0" dirty="0">
+              <a:solidFill>
+                <a:srgbClr val="555555"/>
+              </a:solidFill>
+            </a:endParaRPr>
           </a:p>
         </p:txBody>
       </p:sp>
@@ -6410,28 +6174,48 @@
         <p:spPr>
           <a:xfrm>
             <a:off x="365760" y="6446520"/>
-            <a:ext cx="7315200" cy="274320"/>
-          </a:xfrm>
-          <a:prstGeom prst="rect">
-            <a:avLst/>
-          </a:prstGeom>
-          <a:noFill/>
-        </p:spPr>
-        <p:txBody>
-          <a:bodyPr wrap="square" lIns="45720" rIns="45720" tIns="18288" bIns="18288">
-            <a:spAutoFit/>
-          </a:bodyPr>
-          <a:lstStyle/>
-          <a:p>
-            <a:pPr algn="l"/>
-            <a:r>
-              <a:rPr sz="1000" b="0">
+            <a:ext cx="7315200" cy="190821"/>
+          </a:xfrm>
+          <a:prstGeom prst="rect">
+            <a:avLst/>
+          </a:prstGeom>
+          <a:noFill/>
+        </p:spPr>
+        <p:txBody>
+          <a:bodyPr wrap="square" lIns="45720" tIns="18288" rIns="45720" bIns="18288">
+            <a:spAutoFit/>
+          </a:bodyPr>
+          <a:lstStyle/>
+          <a:p>
+            <a:r>
+              <a:rPr sz="1000" b="0" dirty="0">
                 <a:solidFill>
                   <a:srgbClr val="555555"/>
                 </a:solidFill>
               </a:rPr>
               <a:t>Kickstarter Pre-Launch Recommender  ·  Omar Doughan</a:t>
             </a:r>
+            <a:r>
+              <a:rPr lang="en-US" sz="1000" b="0" dirty="0">
+                <a:solidFill>
+                  <a:srgbClr val="555555"/>
+                </a:solidFill>
+              </a:rPr>
+              <a:t> </a:t>
+            </a:r>
+            <a:r>
+              <a:rPr lang="en-US" sz="1000" dirty="0">
+                <a:solidFill>
+                  <a:srgbClr val="555555"/>
+                </a:solidFill>
+              </a:rPr>
+              <a:t> ·  Ryan Masri</a:t>
+            </a:r>
+            <a:endParaRPr sz="1000" b="0" dirty="0">
+              <a:solidFill>
+                <a:srgbClr val="555555"/>
+              </a:solidFill>
+            </a:endParaRPr>
           </a:p>
         </p:txBody>
       </p:sp>
@@ -6444,7 +6228,7 @@
 </file>
 
 <file path=ppt/slides/slide5.xml><?xml version="1.0" encoding="utf-8"?>
-<p:sld xmlns:a="http://schemas.openxmlformats.org/drawingml/2006/main" xmlns:p="http://schemas.openxmlformats.org/presentationml/2006/main" xmlns:r="http://schemas.openxmlformats.org/officeDocument/2006/relationships">
+<p:sld xmlns:a="http://schemas.openxmlformats.org/drawingml/2006/main" xmlns:r="http://schemas.openxmlformats.org/officeDocument/2006/relationships" xmlns:p="http://schemas.openxmlformats.org/presentationml/2006/main">
   <p:cSld>
     <p:spTree>
       <p:nvGrpSpPr>
@@ -6452,7 +6236,14 @@
         <p:cNvGrpSpPr/>
         <p:nvPr/>
       </p:nvGrpSpPr>
-      <p:grpSpPr/>
+      <p:grpSpPr>
+        <a:xfrm>
+          <a:off x="0" y="0"/>
+          <a:ext cx="0" cy="0"/>
+          <a:chOff x="0" y="0"/>
+          <a:chExt cx="0" cy="0"/>
+        </a:xfrm>
+      </p:grpSpPr>
       <p:sp>
         <p:nvSpPr>
           <p:cNvPr id="2" name="Rectangle 1"/>
@@ -6493,6 +6284,7 @@
           <a:lstStyle/>
           <a:p>
             <a:pPr algn="ctr"/>
+            <a:endParaRPr/>
           </a:p>
         </p:txBody>
       </p:sp>
@@ -6536,40 +6328,7 @@
           <a:lstStyle/>
           <a:p>
             <a:pPr algn="ctr"/>
-          </a:p>
-        </p:txBody>
-      </p:sp>
-      <p:sp>
-        <p:nvSpPr>
-          <p:cNvPr id="4" name="TextBox 3"/>
-          <p:cNvSpPr txBox="1"/>
-          <p:nvPr/>
-        </p:nvSpPr>
-        <p:spPr>
-          <a:xfrm>
-            <a:off x="365760" y="109728"/>
-            <a:ext cx="5486400" cy="365760"/>
-          </a:xfrm>
-          <a:prstGeom prst="rect">
-            <a:avLst/>
-          </a:prstGeom>
-          <a:noFill/>
-        </p:spPr>
-        <p:txBody>
-          <a:bodyPr wrap="square" lIns="45720" rIns="45720" tIns="18288" bIns="18288">
-            <a:spAutoFit/>
-          </a:bodyPr>
-          <a:lstStyle/>
-          <a:p>
-            <a:pPr algn="l"/>
-            <a:r>
-              <a:rPr sz="1200" b="1">
-                <a:solidFill>
-                  <a:srgbClr val="FFFFFF"/>
-                </a:solidFill>
-              </a:rPr>
-              <a:t>PR2 / PR3  ·  MODELS</a:t>
-            </a:r>
+            <a:endParaRPr dirty="0"/>
           </a:p>
         </p:txBody>
       </p:sp>
@@ -6590,7 +6349,7 @@
           <a:noFill/>
         </p:spPr>
         <p:txBody>
-          <a:bodyPr wrap="square" lIns="45720" rIns="45720" tIns="18288" bIns="18288">
+          <a:bodyPr wrap="square" lIns="45720" tIns="18288" rIns="45720" bIns="18288">
             <a:spAutoFit/>
           </a:bodyPr>
           <a:lstStyle/>
@@ -6649,6 +6408,7 @@
           <a:lstStyle/>
           <a:p>
             <a:pPr algn="ctr"/>
+            <a:endParaRPr/>
           </a:p>
         </p:txBody>
       </p:sp>
@@ -6669,7 +6429,7 @@
           <a:noFill/>
         </p:spPr>
         <p:txBody>
-          <a:bodyPr wrap="square" lIns="45720" rIns="45720" tIns="18288" bIns="18288">
+          <a:bodyPr wrap="square" lIns="45720" tIns="18288" rIns="45720" bIns="18288">
             <a:spAutoFit/>
           </a:bodyPr>
           <a:lstStyle/>
@@ -6703,7 +6463,7 @@
           <a:noFill/>
         </p:spPr>
         <p:txBody>
-          <a:bodyPr wrap="square" lIns="45720" rIns="45720" tIns="18288" bIns="18288">
+          <a:bodyPr wrap="square" lIns="45720" tIns="18288" rIns="45720" bIns="18288">
             <a:spAutoFit/>
           </a:bodyPr>
           <a:lstStyle/>
@@ -6737,7 +6497,7 @@
           <a:noFill/>
         </p:spPr>
         <p:txBody>
-          <a:bodyPr wrap="square" lIns="45720" rIns="45720" tIns="18288" bIns="18288">
+          <a:bodyPr wrap="square" lIns="45720" tIns="18288" rIns="45720" bIns="18288">
             <a:spAutoFit/>
           </a:bodyPr>
           <a:lstStyle/>
@@ -6796,6 +6556,7 @@
           <a:lstStyle/>
           <a:p>
             <a:pPr algn="ctr"/>
+            <a:endParaRPr/>
           </a:p>
         </p:txBody>
       </p:sp>
@@ -6816,7 +6577,7 @@
           <a:noFill/>
         </p:spPr>
         <p:txBody>
-          <a:bodyPr wrap="square" lIns="45720" rIns="45720" tIns="18288" bIns="18288">
+          <a:bodyPr wrap="square" lIns="45720" tIns="18288" rIns="45720" bIns="18288">
             <a:spAutoFit/>
           </a:bodyPr>
           <a:lstStyle/>
@@ -6850,7 +6611,7 @@
           <a:noFill/>
         </p:spPr>
         <p:txBody>
-          <a:bodyPr wrap="square" lIns="45720" rIns="45720" tIns="18288" bIns="18288">
+          <a:bodyPr wrap="square" lIns="45720" tIns="18288" rIns="45720" bIns="18288">
             <a:spAutoFit/>
           </a:bodyPr>
           <a:lstStyle/>
@@ -6884,7 +6645,7 @@
           <a:noFill/>
         </p:spPr>
         <p:txBody>
-          <a:bodyPr wrap="square" lIns="45720" rIns="45720" tIns="18288" bIns="18288">
+          <a:bodyPr wrap="square" lIns="45720" tIns="18288" rIns="45720" bIns="18288">
             <a:spAutoFit/>
           </a:bodyPr>
           <a:lstStyle/>
@@ -6943,6 +6704,7 @@
           <a:lstStyle/>
           <a:p>
             <a:pPr algn="ctr"/>
+            <a:endParaRPr/>
           </a:p>
         </p:txBody>
       </p:sp>
@@ -6963,7 +6725,7 @@
           <a:noFill/>
         </p:spPr>
         <p:txBody>
-          <a:bodyPr wrap="square" lIns="45720" rIns="45720" tIns="18288" bIns="18288">
+          <a:bodyPr wrap="square" lIns="45720" tIns="18288" rIns="45720" bIns="18288">
             <a:spAutoFit/>
           </a:bodyPr>
           <a:lstStyle/>
@@ -6997,7 +6759,7 @@
           <a:noFill/>
         </p:spPr>
         <p:txBody>
-          <a:bodyPr wrap="square" lIns="45720" rIns="45720" tIns="18288" bIns="18288">
+          <a:bodyPr wrap="square" lIns="45720" tIns="18288" rIns="45720" bIns="18288">
             <a:spAutoFit/>
           </a:bodyPr>
           <a:lstStyle/>
@@ -7031,7 +6793,7 @@
           <a:noFill/>
         </p:spPr>
         <p:txBody>
-          <a:bodyPr wrap="square" lIns="45720" rIns="45720" tIns="18288" bIns="18288">
+          <a:bodyPr wrap="square" lIns="45720" tIns="18288" rIns="45720" bIns="18288">
             <a:spAutoFit/>
           </a:bodyPr>
           <a:lstStyle/>
@@ -7090,6 +6852,7 @@
           <a:lstStyle/>
           <a:p>
             <a:pPr algn="ctr"/>
+            <a:endParaRPr/>
           </a:p>
         </p:txBody>
       </p:sp>
@@ -7110,7 +6873,7 @@
           <a:noFill/>
         </p:spPr>
         <p:txBody>
-          <a:bodyPr wrap="square" lIns="45720" rIns="45720" tIns="18288" bIns="18288">
+          <a:bodyPr wrap="square" lIns="45720" tIns="18288" rIns="45720" bIns="18288">
             <a:spAutoFit/>
           </a:bodyPr>
           <a:lstStyle/>
@@ -7144,7 +6907,7 @@
           <a:noFill/>
         </p:spPr>
         <p:txBody>
-          <a:bodyPr wrap="square" lIns="45720" rIns="45720" tIns="18288" bIns="18288">
+          <a:bodyPr wrap="square" lIns="45720" tIns="18288" rIns="45720" bIns="18288">
             <a:spAutoFit/>
           </a:bodyPr>
           <a:lstStyle/>
@@ -7178,7 +6941,7 @@
           <a:noFill/>
         </p:spPr>
         <p:txBody>
-          <a:bodyPr wrap="square" lIns="45720" rIns="45720" tIns="18288" bIns="18288">
+          <a:bodyPr wrap="square" lIns="45720" tIns="18288" rIns="45720" bIns="18288">
             <a:spAutoFit/>
           </a:bodyPr>
           <a:lstStyle/>
@@ -7204,7 +6967,7 @@
         <p:spPr>
           <a:xfrm>
             <a:off x="548640" y="4663440"/>
-            <a:ext cx="10972800" cy="1828800"/>
+            <a:ext cx="10972800" cy="1220847"/>
           </a:xfrm>
           <a:prstGeom prst="rect">
             <a:avLst/>
@@ -7223,12 +6986,28 @@
               </a:spcAft>
             </a:pPr>
             <a:r>
-              <a:rPr sz="1800">
+              <a:rPr sz="2000" dirty="0">
                 <a:solidFill>
                   <a:srgbClr val="122A4F"/>
                 </a:solidFill>
               </a:rPr>
-              <a:t>•  Tabular-only XGBoost = the deployable demo (8.5 MB model).</a:t>
+              <a:t>•  Tabular-only </a:t>
+            </a:r>
+            <a:r>
+              <a:rPr sz="2000" dirty="0" err="1">
+                <a:solidFill>
+                  <a:srgbClr val="122A4F"/>
+                </a:solidFill>
+              </a:rPr>
+              <a:t>XGBoost</a:t>
+            </a:r>
+            <a:r>
+              <a:rPr sz="2000" dirty="0">
+                <a:solidFill>
+                  <a:srgbClr val="122A4F"/>
+                </a:solidFill>
+              </a:rPr>
+              <a:t> = the deployable demo (8.5 MB model).</a:t>
             </a:r>
           </a:p>
           <a:p>
@@ -7238,12 +7017,28 @@
               </a:spcAft>
             </a:pPr>
             <a:r>
-              <a:rPr sz="1800">
+              <a:rPr sz="2000" dirty="0">
                 <a:solidFill>
                   <a:srgbClr val="122A4F"/>
                 </a:solidFill>
               </a:rPr>
-              <a:t>•  Full model (596k features) trained on RTX 5070 with QuantileDMatrix to fit 12 GB VRAM.</a:t>
+              <a:t>•  Full model (596k features) trained on RTX 5070 with </a:t>
+            </a:r>
+            <a:r>
+              <a:rPr sz="2000" dirty="0" err="1">
+                <a:solidFill>
+                  <a:srgbClr val="122A4F"/>
+                </a:solidFill>
+              </a:rPr>
+              <a:t>QuantileDMatrix</a:t>
+            </a:r>
+            <a:r>
+              <a:rPr sz="2000" dirty="0">
+                <a:solidFill>
+                  <a:srgbClr val="122A4F"/>
+                </a:solidFill>
+              </a:rPr>
+              <a:t> to fit 12 GB VRAM.</a:t>
             </a:r>
           </a:p>
           <a:p>
@@ -7253,7 +7048,7 @@
               </a:spcAft>
             </a:pPr>
             <a:r>
-              <a:rPr sz="1800">
+              <a:rPr sz="2000" dirty="0">
                 <a:solidFill>
                   <a:srgbClr val="122A4F"/>
                 </a:solidFill>
@@ -7272,28 +7067,41 @@
         <p:spPr>
           <a:xfrm>
             <a:off x="10515600" y="6446520"/>
-            <a:ext cx="1554480" cy="274320"/>
-          </a:xfrm>
-          <a:prstGeom prst="rect">
-            <a:avLst/>
-          </a:prstGeom>
-          <a:noFill/>
-        </p:spPr>
-        <p:txBody>
-          <a:bodyPr wrap="square" lIns="45720" rIns="45720" tIns="18288" bIns="18288">
+            <a:ext cx="1554480" cy="190821"/>
+          </a:xfrm>
+          <a:prstGeom prst="rect">
+            <a:avLst/>
+          </a:prstGeom>
+          <a:noFill/>
+        </p:spPr>
+        <p:txBody>
+          <a:bodyPr wrap="square" lIns="45720" tIns="18288" rIns="45720" bIns="18288">
             <a:spAutoFit/>
           </a:bodyPr>
           <a:lstStyle/>
           <a:p>
             <a:pPr algn="r"/>
             <a:r>
-              <a:rPr sz="1000" b="0">
+              <a:rPr sz="1000" b="0" dirty="0">
                 <a:solidFill>
                   <a:srgbClr val="555555"/>
                 </a:solidFill>
               </a:rPr>
-              <a:t>5 / 12</a:t>
-            </a:r>
+              <a:t>5 / </a:t>
+            </a:r>
+            <a:r>
+              <a:rPr lang="en-US" sz="1000" b="0" dirty="0">
+                <a:solidFill>
+                  <a:srgbClr val="555555"/>
+                </a:solidFill>
+              </a:rPr>
+              <a:t>11</a:t>
+            </a:r>
+            <a:endParaRPr sz="1000" b="0" dirty="0">
+              <a:solidFill>
+                <a:srgbClr val="555555"/>
+              </a:solidFill>
+            </a:endParaRPr>
           </a:p>
         </p:txBody>
       </p:sp>
@@ -7306,28 +7114,48 @@
         <p:spPr>
           <a:xfrm>
             <a:off x="365760" y="6446520"/>
-            <a:ext cx="7315200" cy="274320"/>
-          </a:xfrm>
-          <a:prstGeom prst="rect">
-            <a:avLst/>
-          </a:prstGeom>
-          <a:noFill/>
-        </p:spPr>
-        <p:txBody>
-          <a:bodyPr wrap="square" lIns="45720" rIns="45720" tIns="18288" bIns="18288">
-            <a:spAutoFit/>
-          </a:bodyPr>
-          <a:lstStyle/>
-          <a:p>
-            <a:pPr algn="l"/>
-            <a:r>
-              <a:rPr sz="1000" b="0">
+            <a:ext cx="7315200" cy="190821"/>
+          </a:xfrm>
+          <a:prstGeom prst="rect">
+            <a:avLst/>
+          </a:prstGeom>
+          <a:noFill/>
+        </p:spPr>
+        <p:txBody>
+          <a:bodyPr wrap="square" lIns="45720" tIns="18288" rIns="45720" bIns="18288">
+            <a:spAutoFit/>
+          </a:bodyPr>
+          <a:lstStyle/>
+          <a:p>
+            <a:r>
+              <a:rPr sz="1000" b="0" dirty="0">
                 <a:solidFill>
                   <a:srgbClr val="555555"/>
                 </a:solidFill>
               </a:rPr>
               <a:t>Kickstarter Pre-Launch Recommender  ·  Omar Doughan</a:t>
             </a:r>
+            <a:r>
+              <a:rPr lang="en-US" sz="1000" b="0" dirty="0">
+                <a:solidFill>
+                  <a:srgbClr val="555555"/>
+                </a:solidFill>
+              </a:rPr>
+              <a:t> </a:t>
+            </a:r>
+            <a:r>
+              <a:rPr lang="en-US" sz="1000" dirty="0">
+                <a:solidFill>
+                  <a:srgbClr val="555555"/>
+                </a:solidFill>
+              </a:rPr>
+              <a:t> ·  Ryan Masri</a:t>
+            </a:r>
+            <a:endParaRPr sz="1000" b="0" dirty="0">
+              <a:solidFill>
+                <a:srgbClr val="555555"/>
+              </a:solidFill>
+            </a:endParaRPr>
           </a:p>
         </p:txBody>
       </p:sp>
@@ -7340,7 +7168,7 @@
 </file>
 
 <file path=ppt/slides/slide6.xml><?xml version="1.0" encoding="utf-8"?>
-<p:sld xmlns:a="http://schemas.openxmlformats.org/drawingml/2006/main" xmlns:p="http://schemas.openxmlformats.org/presentationml/2006/main" xmlns:r="http://schemas.openxmlformats.org/officeDocument/2006/relationships">
+<p:sld xmlns:a="http://schemas.openxmlformats.org/drawingml/2006/main" xmlns:r="http://schemas.openxmlformats.org/officeDocument/2006/relationships" xmlns:p="http://schemas.openxmlformats.org/presentationml/2006/main">
   <p:cSld>
     <p:spTree>
       <p:nvGrpSpPr>
@@ -7348,7 +7176,14 @@
         <p:cNvGrpSpPr/>
         <p:nvPr/>
       </p:nvGrpSpPr>
-      <p:grpSpPr/>
+      <p:grpSpPr>
+        <a:xfrm>
+          <a:off x="0" y="0"/>
+          <a:ext cx="0" cy="0"/>
+          <a:chOff x="0" y="0"/>
+          <a:chExt cx="0" cy="0"/>
+        </a:xfrm>
+      </p:grpSpPr>
       <p:sp>
         <p:nvSpPr>
           <p:cNvPr id="2" name="Rectangle 1"/>
@@ -7389,6 +7224,7 @@
           <a:lstStyle/>
           <a:p>
             <a:pPr algn="ctr"/>
+            <a:endParaRPr/>
           </a:p>
         </p:txBody>
       </p:sp>
@@ -7432,40 +7268,7 @@
           <a:lstStyle/>
           <a:p>
             <a:pPr algn="ctr"/>
-          </a:p>
-        </p:txBody>
-      </p:sp>
-      <p:sp>
-        <p:nvSpPr>
-          <p:cNvPr id="4" name="TextBox 3"/>
-          <p:cNvSpPr txBox="1"/>
-          <p:nvPr/>
-        </p:nvSpPr>
-        <p:spPr>
-          <a:xfrm>
-            <a:off x="365760" y="109728"/>
-            <a:ext cx="5486400" cy="365760"/>
-          </a:xfrm>
-          <a:prstGeom prst="rect">
-            <a:avLst/>
-          </a:prstGeom>
-          <a:noFill/>
-        </p:spPr>
-        <p:txBody>
-          <a:bodyPr wrap="square" lIns="45720" rIns="45720" tIns="18288" bIns="18288">
-            <a:spAutoFit/>
-          </a:bodyPr>
-          <a:lstStyle/>
-          <a:p>
-            <a:pPr algn="l"/>
-            <a:r>
-              <a:rPr sz="1200" b="1">
-                <a:solidFill>
-                  <a:srgbClr val="FFFFFF"/>
-                </a:solidFill>
-              </a:rPr>
-              <a:t>PR3  ·  CONTRIBUTION 1</a:t>
-            </a:r>
+            <a:endParaRPr/>
           </a:p>
         </p:txBody>
       </p:sp>
@@ -7486,7 +7289,7 @@
           <a:noFill/>
         </p:spPr>
         <p:txBody>
-          <a:bodyPr wrap="square" lIns="45720" rIns="45720" tIns="18288" bIns="18288">
+          <a:bodyPr wrap="square" lIns="45720" tIns="18288" rIns="45720" bIns="18288">
             <a:spAutoFit/>
           </a:bodyPr>
           <a:lstStyle/>
@@ -7520,7 +7323,7 @@
           <a:noFill/>
         </p:spPr>
         <p:txBody>
-          <a:bodyPr wrap="square" lIns="45720" rIns="45720" tIns="18288" bIns="18288">
+          <a:bodyPr wrap="square" lIns="45720" tIns="18288" rIns="45720" bIns="18288">
             <a:spAutoFit/>
           </a:bodyPr>
           <a:lstStyle/>
@@ -7579,6 +7382,7 @@
           <a:lstStyle/>
           <a:p>
             <a:pPr algn="ctr"/>
+            <a:endParaRPr/>
           </a:p>
         </p:txBody>
       </p:sp>
@@ -7599,7 +7403,7 @@
           <a:noFill/>
         </p:spPr>
         <p:txBody>
-          <a:bodyPr wrap="square" lIns="45720" rIns="45720" tIns="18288" bIns="18288">
+          <a:bodyPr wrap="square" lIns="45720" tIns="18288" rIns="45720" bIns="18288">
             <a:spAutoFit/>
           </a:bodyPr>
           <a:lstStyle/>
@@ -7655,7 +7459,7 @@
           <a:noFill/>
         </p:spPr>
         <p:txBody>
-          <a:bodyPr wrap="square" lIns="45720" rIns="45720" tIns="18288" bIns="18288">
+          <a:bodyPr wrap="square" lIns="45720" tIns="18288" rIns="45720" bIns="18288">
             <a:spAutoFit/>
           </a:bodyPr>
           <a:lstStyle/>
@@ -7714,6 +7518,7 @@
           <a:lstStyle/>
           <a:p>
             <a:pPr algn="ctr"/>
+            <a:endParaRPr/>
           </a:p>
         </p:txBody>
       </p:sp>
@@ -7734,7 +7539,7 @@
           <a:noFill/>
         </p:spPr>
         <p:txBody>
-          <a:bodyPr wrap="square" lIns="45720" rIns="45720" tIns="18288" bIns="18288">
+          <a:bodyPr wrap="square" lIns="45720" tIns="18288" rIns="45720" bIns="18288">
             <a:spAutoFit/>
           </a:bodyPr>
           <a:lstStyle/>
@@ -7771,28 +7576,41 @@
         <p:spPr>
           <a:xfrm>
             <a:off x="10515600" y="6446520"/>
-            <a:ext cx="1554480" cy="274320"/>
-          </a:xfrm>
-          <a:prstGeom prst="rect">
-            <a:avLst/>
-          </a:prstGeom>
-          <a:noFill/>
-        </p:spPr>
-        <p:txBody>
-          <a:bodyPr wrap="square" lIns="45720" rIns="45720" tIns="18288" bIns="18288">
+            <a:ext cx="1554480" cy="190821"/>
+          </a:xfrm>
+          <a:prstGeom prst="rect">
+            <a:avLst/>
+          </a:prstGeom>
+          <a:noFill/>
+        </p:spPr>
+        <p:txBody>
+          <a:bodyPr wrap="square" lIns="45720" tIns="18288" rIns="45720" bIns="18288">
             <a:spAutoFit/>
           </a:bodyPr>
           <a:lstStyle/>
           <a:p>
             <a:pPr algn="r"/>
             <a:r>
-              <a:rPr sz="1000" b="0">
+              <a:rPr sz="1000" b="0" dirty="0">
                 <a:solidFill>
                   <a:srgbClr val="555555"/>
                 </a:solidFill>
               </a:rPr>
-              <a:t>6 / 12</a:t>
-            </a:r>
+              <a:t>6 / </a:t>
+            </a:r>
+            <a:r>
+              <a:rPr lang="en-US" sz="1000" b="0" dirty="0">
+                <a:solidFill>
+                  <a:srgbClr val="555555"/>
+                </a:solidFill>
+              </a:rPr>
+              <a:t>11</a:t>
+            </a:r>
+            <a:endParaRPr sz="1000" b="0" dirty="0">
+              <a:solidFill>
+                <a:srgbClr val="555555"/>
+              </a:solidFill>
+            </a:endParaRPr>
           </a:p>
         </p:txBody>
       </p:sp>
@@ -7805,28 +7623,48 @@
         <p:spPr>
           <a:xfrm>
             <a:off x="365760" y="6446520"/>
-            <a:ext cx="7315200" cy="274320"/>
-          </a:xfrm>
-          <a:prstGeom prst="rect">
-            <a:avLst/>
-          </a:prstGeom>
-          <a:noFill/>
-        </p:spPr>
-        <p:txBody>
-          <a:bodyPr wrap="square" lIns="45720" rIns="45720" tIns="18288" bIns="18288">
-            <a:spAutoFit/>
-          </a:bodyPr>
-          <a:lstStyle/>
-          <a:p>
-            <a:pPr algn="l"/>
-            <a:r>
-              <a:rPr sz="1000" b="0">
+            <a:ext cx="7315200" cy="190821"/>
+          </a:xfrm>
+          <a:prstGeom prst="rect">
+            <a:avLst/>
+          </a:prstGeom>
+          <a:noFill/>
+        </p:spPr>
+        <p:txBody>
+          <a:bodyPr wrap="square" lIns="45720" tIns="18288" rIns="45720" bIns="18288">
+            <a:spAutoFit/>
+          </a:bodyPr>
+          <a:lstStyle/>
+          <a:p>
+            <a:r>
+              <a:rPr sz="1000" b="0" dirty="0">
                 <a:solidFill>
                   <a:srgbClr val="555555"/>
                 </a:solidFill>
               </a:rPr>
               <a:t>Kickstarter Pre-Launch Recommender  ·  Omar Doughan</a:t>
             </a:r>
+            <a:r>
+              <a:rPr lang="en-US" sz="1000" b="0" dirty="0">
+                <a:solidFill>
+                  <a:srgbClr val="555555"/>
+                </a:solidFill>
+              </a:rPr>
+              <a:t> </a:t>
+            </a:r>
+            <a:r>
+              <a:rPr lang="en-US" sz="1000" dirty="0">
+                <a:solidFill>
+                  <a:srgbClr val="555555"/>
+                </a:solidFill>
+              </a:rPr>
+              <a:t> ·  Ryan Masri</a:t>
+            </a:r>
+            <a:endParaRPr sz="1000" b="0" dirty="0">
+              <a:solidFill>
+                <a:srgbClr val="555555"/>
+              </a:solidFill>
+            </a:endParaRPr>
           </a:p>
         </p:txBody>
       </p:sp>
@@ -7839,7 +7677,7 @@
 </file>
 
 <file path=ppt/slides/slide7.xml><?xml version="1.0" encoding="utf-8"?>
-<p:sld xmlns:a="http://schemas.openxmlformats.org/drawingml/2006/main" xmlns:p="http://schemas.openxmlformats.org/presentationml/2006/main" xmlns:r="http://schemas.openxmlformats.org/officeDocument/2006/relationships">
+<p:sld xmlns:a="http://schemas.openxmlformats.org/drawingml/2006/main" xmlns:r="http://schemas.openxmlformats.org/officeDocument/2006/relationships" xmlns:p="http://schemas.openxmlformats.org/presentationml/2006/main">
   <p:cSld>
     <p:spTree>
       <p:nvGrpSpPr>
@@ -7847,7 +7685,14 @@
         <p:cNvGrpSpPr/>
         <p:nvPr/>
       </p:nvGrpSpPr>
-      <p:grpSpPr/>
+      <p:grpSpPr>
+        <a:xfrm>
+          <a:off x="0" y="0"/>
+          <a:ext cx="0" cy="0"/>
+          <a:chOff x="0" y="0"/>
+          <a:chExt cx="0" cy="0"/>
+        </a:xfrm>
+      </p:grpSpPr>
       <p:sp>
         <p:nvSpPr>
           <p:cNvPr id="2" name="Rectangle 1"/>
@@ -7888,6 +7733,7 @@
           <a:lstStyle/>
           <a:p>
             <a:pPr algn="ctr"/>
+            <a:endParaRPr/>
           </a:p>
         </p:txBody>
       </p:sp>
@@ -7931,40 +7777,7 @@
           <a:lstStyle/>
           <a:p>
             <a:pPr algn="ctr"/>
-          </a:p>
-        </p:txBody>
-      </p:sp>
-      <p:sp>
-        <p:nvSpPr>
-          <p:cNvPr id="4" name="TextBox 3"/>
-          <p:cNvSpPr txBox="1"/>
-          <p:nvPr/>
-        </p:nvSpPr>
-        <p:spPr>
-          <a:xfrm>
-            <a:off x="365760" y="109728"/>
-            <a:ext cx="5486400" cy="365760"/>
-          </a:xfrm>
-          <a:prstGeom prst="rect">
-            <a:avLst/>
-          </a:prstGeom>
-          <a:noFill/>
-        </p:spPr>
-        <p:txBody>
-          <a:bodyPr wrap="square" lIns="45720" rIns="45720" tIns="18288" bIns="18288">
-            <a:spAutoFit/>
-          </a:bodyPr>
-          <a:lstStyle/>
-          <a:p>
-            <a:pPr algn="l"/>
-            <a:r>
-              <a:rPr sz="1200" b="1">
-                <a:solidFill>
-                  <a:srgbClr val="FFFFFF"/>
-                </a:solidFill>
-              </a:rPr>
-              <a:t>PR3  ·  CONTRIBUTION 2</a:t>
-            </a:r>
+            <a:endParaRPr/>
           </a:p>
         </p:txBody>
       </p:sp>
@@ -7985,7 +7798,7 @@
           <a:noFill/>
         </p:spPr>
         <p:txBody>
-          <a:bodyPr wrap="square" lIns="45720" rIns="45720" tIns="18288" bIns="18288">
+          <a:bodyPr wrap="square" lIns="45720" tIns="18288" rIns="45720" bIns="18288">
             <a:spAutoFit/>
           </a:bodyPr>
           <a:lstStyle/>
@@ -8044,6 +7857,7 @@
           <a:lstStyle/>
           <a:p>
             <a:pPr algn="ctr"/>
+            <a:endParaRPr/>
           </a:p>
         </p:txBody>
       </p:sp>
@@ -8064,7 +7878,7 @@
           <a:noFill/>
         </p:spPr>
         <p:txBody>
-          <a:bodyPr wrap="square" lIns="45720" rIns="45720" tIns="18288" bIns="18288">
+          <a:bodyPr wrap="square" lIns="45720" tIns="18288" rIns="45720" bIns="18288">
             <a:spAutoFit/>
           </a:bodyPr>
           <a:lstStyle/>
@@ -8098,7 +7912,7 @@
           <a:noFill/>
         </p:spPr>
         <p:txBody>
-          <a:bodyPr wrap="square" lIns="45720" rIns="45720" tIns="18288" bIns="18288">
+          <a:bodyPr wrap="square" lIns="45720" tIns="18288" rIns="45720" bIns="18288">
             <a:spAutoFit/>
           </a:bodyPr>
           <a:lstStyle/>
@@ -8132,7 +7946,7 @@
           <a:noFill/>
         </p:spPr>
         <p:txBody>
-          <a:bodyPr wrap="square" lIns="45720" rIns="45720" tIns="18288" bIns="18288">
+          <a:bodyPr wrap="square" lIns="45720" tIns="18288" rIns="45720" bIns="18288">
             <a:spAutoFit/>
           </a:bodyPr>
           <a:lstStyle/>
@@ -8166,7 +7980,7 @@
           <a:noFill/>
         </p:spPr>
         <p:txBody>
-          <a:bodyPr wrap="square" lIns="45720" rIns="45720" tIns="18288" bIns="18288">
+          <a:bodyPr wrap="square" lIns="45720" tIns="18288" rIns="45720" bIns="18288">
             <a:spAutoFit/>
           </a:bodyPr>
           <a:lstStyle/>
@@ -8225,6 +8039,7 @@
           <a:lstStyle/>
           <a:p>
             <a:pPr algn="ctr"/>
+            <a:endParaRPr/>
           </a:p>
         </p:txBody>
       </p:sp>
@@ -8245,7 +8060,7 @@
           <a:noFill/>
         </p:spPr>
         <p:txBody>
-          <a:bodyPr wrap="square" lIns="45720" rIns="45720" tIns="18288" bIns="18288">
+          <a:bodyPr wrap="square" lIns="45720" tIns="18288" rIns="45720" bIns="18288">
             <a:spAutoFit/>
           </a:bodyPr>
           <a:lstStyle/>
@@ -8279,7 +8094,7 @@
           <a:noFill/>
         </p:spPr>
         <p:txBody>
-          <a:bodyPr wrap="square" lIns="45720" rIns="45720" tIns="18288" bIns="18288">
+          <a:bodyPr wrap="square" lIns="45720" tIns="18288" rIns="45720" bIns="18288">
             <a:spAutoFit/>
           </a:bodyPr>
           <a:lstStyle/>
@@ -8313,7 +8128,7 @@
           <a:noFill/>
         </p:spPr>
         <p:txBody>
-          <a:bodyPr wrap="square" lIns="45720" rIns="45720" tIns="18288" bIns="18288">
+          <a:bodyPr wrap="square" lIns="45720" tIns="18288" rIns="45720" bIns="18288">
             <a:spAutoFit/>
           </a:bodyPr>
           <a:lstStyle/>
@@ -8347,7 +8162,7 @@
           <a:noFill/>
         </p:spPr>
         <p:txBody>
-          <a:bodyPr wrap="square" lIns="45720" rIns="45720" tIns="18288" bIns="18288">
+          <a:bodyPr wrap="square" lIns="45720" tIns="18288" rIns="45720" bIns="18288">
             <a:spAutoFit/>
           </a:bodyPr>
           <a:lstStyle/>
@@ -8406,6 +8221,7 @@
           <a:lstStyle/>
           <a:p>
             <a:pPr algn="ctr"/>
+            <a:endParaRPr/>
           </a:p>
         </p:txBody>
       </p:sp>
@@ -8426,7 +8242,7 @@
           <a:noFill/>
         </p:spPr>
         <p:txBody>
-          <a:bodyPr wrap="square" lIns="45720" rIns="45720" tIns="18288" bIns="18288">
+          <a:bodyPr wrap="square" lIns="45720" tIns="18288" rIns="45720" bIns="18288">
             <a:spAutoFit/>
           </a:bodyPr>
           <a:lstStyle/>
@@ -8460,7 +8276,7 @@
           <a:noFill/>
         </p:spPr>
         <p:txBody>
-          <a:bodyPr wrap="square" lIns="45720" rIns="45720" tIns="18288" bIns="18288">
+          <a:bodyPr wrap="square" lIns="45720" tIns="18288" rIns="45720" bIns="18288">
             <a:spAutoFit/>
           </a:bodyPr>
           <a:lstStyle/>
@@ -8494,7 +8310,7 @@
           <a:noFill/>
         </p:spPr>
         <p:txBody>
-          <a:bodyPr wrap="square" lIns="45720" rIns="45720" tIns="18288" bIns="18288">
+          <a:bodyPr wrap="square" lIns="45720" tIns="18288" rIns="45720" bIns="18288">
             <a:spAutoFit/>
           </a:bodyPr>
           <a:lstStyle/>
@@ -8528,7 +8344,7 @@
           <a:noFill/>
         </p:spPr>
         <p:txBody>
-          <a:bodyPr wrap="square" lIns="45720" rIns="45720" tIns="18288" bIns="18288">
+          <a:bodyPr wrap="square" lIns="45720" tIns="18288" rIns="45720" bIns="18288">
             <a:spAutoFit/>
           </a:bodyPr>
           <a:lstStyle/>
@@ -8587,6 +8403,7 @@
           <a:lstStyle/>
           <a:p>
             <a:pPr algn="ctr"/>
+            <a:endParaRPr/>
           </a:p>
         </p:txBody>
       </p:sp>
@@ -8607,7 +8424,7 @@
           <a:noFill/>
         </p:spPr>
         <p:txBody>
-          <a:bodyPr wrap="square" lIns="45720" rIns="45720" tIns="18288" bIns="18288">
+          <a:bodyPr wrap="square" lIns="45720" tIns="18288" rIns="45720" bIns="18288">
             <a:spAutoFit/>
           </a:bodyPr>
           <a:lstStyle/>
@@ -8641,7 +8458,7 @@
           <a:noFill/>
         </p:spPr>
         <p:txBody>
-          <a:bodyPr wrap="square" lIns="45720" rIns="45720" tIns="18288" bIns="18288">
+          <a:bodyPr wrap="square" lIns="45720" tIns="18288" rIns="45720" bIns="18288">
             <a:spAutoFit/>
           </a:bodyPr>
           <a:lstStyle/>
@@ -8675,7 +8492,7 @@
           <a:noFill/>
         </p:spPr>
         <p:txBody>
-          <a:bodyPr wrap="square" lIns="45720" rIns="45720" tIns="18288" bIns="18288">
+          <a:bodyPr wrap="square" lIns="45720" tIns="18288" rIns="45720" bIns="18288">
             <a:spAutoFit/>
           </a:bodyPr>
           <a:lstStyle/>
@@ -8709,7 +8526,7 @@
           <a:noFill/>
         </p:spPr>
         <p:txBody>
-          <a:bodyPr wrap="square" lIns="45720" rIns="45720" tIns="18288" bIns="18288">
+          <a:bodyPr wrap="square" lIns="45720" tIns="18288" rIns="45720" bIns="18288">
             <a:spAutoFit/>
           </a:bodyPr>
           <a:lstStyle/>
@@ -8768,6 +8585,7 @@
           <a:lstStyle/>
           <a:p>
             <a:pPr algn="ctr"/>
+            <a:endParaRPr/>
           </a:p>
         </p:txBody>
       </p:sp>
@@ -8788,7 +8606,7 @@
           <a:noFill/>
         </p:spPr>
         <p:txBody>
-          <a:bodyPr wrap="square" lIns="45720" rIns="45720" tIns="18288" bIns="18288">
+          <a:bodyPr wrap="square" lIns="45720" tIns="18288" rIns="45720" bIns="18288">
             <a:spAutoFit/>
           </a:bodyPr>
           <a:lstStyle/>
@@ -8822,7 +8640,7 @@
           <a:noFill/>
         </p:spPr>
         <p:txBody>
-          <a:bodyPr wrap="square" lIns="45720" rIns="45720" tIns="18288" bIns="18288">
+          <a:bodyPr wrap="square" lIns="45720" tIns="18288" rIns="45720" bIns="18288">
             <a:spAutoFit/>
           </a:bodyPr>
           <a:lstStyle/>
@@ -8856,7 +8674,7 @@
           <a:noFill/>
         </p:spPr>
         <p:txBody>
-          <a:bodyPr wrap="square" lIns="45720" rIns="45720" tIns="18288" bIns="18288">
+          <a:bodyPr wrap="square" lIns="45720" tIns="18288" rIns="45720" bIns="18288">
             <a:spAutoFit/>
           </a:bodyPr>
           <a:lstStyle/>
@@ -8890,7 +8708,7 @@
           <a:noFill/>
         </p:spPr>
         <p:txBody>
-          <a:bodyPr wrap="square" lIns="45720" rIns="45720" tIns="18288" bIns="18288">
+          <a:bodyPr wrap="square" lIns="45720" tIns="18288" rIns="45720" bIns="18288">
             <a:spAutoFit/>
           </a:bodyPr>
           <a:lstStyle/>
@@ -8924,14 +8742,14 @@
           <a:noFill/>
         </p:spPr>
         <p:txBody>
-          <a:bodyPr wrap="square" lIns="45720" rIns="45720" tIns="18288" bIns="18288">
+          <a:bodyPr wrap="square" lIns="45720" tIns="18288" rIns="45720" bIns="18288">
             <a:spAutoFit/>
           </a:bodyPr>
           <a:lstStyle/>
           <a:p>
             <a:pPr algn="l"/>
             <a:r>
-              <a:rPr sz="1800" b="1">
+              <a:rPr sz="1800" b="1" dirty="0">
                 <a:solidFill>
                   <a:srgbClr val="122A4F"/>
                 </a:solidFill>
@@ -8950,7 +8768,7 @@
         <p:spPr>
           <a:xfrm>
             <a:off x="731520" y="5349240"/>
-            <a:ext cx="10972800" cy="1371600"/>
+            <a:ext cx="10972800" cy="687368"/>
           </a:xfrm>
           <a:prstGeom prst="rect">
             <a:avLst/>
@@ -8969,7 +8787,7 @@
               </a:spcAft>
             </a:pPr>
             <a:r>
-              <a:rPr sz="1600">
+              <a:rPr sz="1600" dirty="0">
                 <a:solidFill>
                   <a:srgbClr val="122A4F"/>
                 </a:solidFill>
@@ -8984,12 +8802,28 @@
               </a:spcAft>
             </a:pPr>
             <a:r>
-              <a:rPr sz="1600">
+              <a:rPr sz="1600" dirty="0">
                 <a:solidFill>
                   <a:srgbClr val="122A4F"/>
                 </a:solidFill>
               </a:rPr>
-              <a:t>•  We retrain on rolling windows. We do NOT trust a 2014 model on 2025 campaigns.</a:t>
+              <a:t>•  We retrain on rolling windows. We do </a:t>
+            </a:r>
+            <a:r>
+              <a:rPr lang="en-US" sz="1600" dirty="0">
+                <a:solidFill>
+                  <a:srgbClr val="122A4F"/>
+                </a:solidFill>
+              </a:rPr>
+              <a:t>not</a:t>
+            </a:r>
+            <a:r>
+              <a:rPr sz="1600" dirty="0">
+                <a:solidFill>
+                  <a:srgbClr val="122A4F"/>
+                </a:solidFill>
+              </a:rPr>
+              <a:t> trust a 2014 model on 2025 campaigns.</a:t>
             </a:r>
           </a:p>
         </p:txBody>
@@ -9003,28 +8837,41 @@
         <p:spPr>
           <a:xfrm>
             <a:off x="10515600" y="6446520"/>
-            <a:ext cx="1554480" cy="274320"/>
-          </a:xfrm>
-          <a:prstGeom prst="rect">
-            <a:avLst/>
-          </a:prstGeom>
-          <a:noFill/>
-        </p:spPr>
-        <p:txBody>
-          <a:bodyPr wrap="square" lIns="45720" rIns="45720" tIns="18288" bIns="18288">
+            <a:ext cx="1554480" cy="190821"/>
+          </a:xfrm>
+          <a:prstGeom prst="rect">
+            <a:avLst/>
+          </a:prstGeom>
+          <a:noFill/>
+        </p:spPr>
+        <p:txBody>
+          <a:bodyPr wrap="square" lIns="45720" tIns="18288" rIns="45720" bIns="18288">
             <a:spAutoFit/>
           </a:bodyPr>
           <a:lstStyle/>
           <a:p>
             <a:pPr algn="r"/>
             <a:r>
-              <a:rPr sz="1000" b="0">
+              <a:rPr sz="1000" b="0" dirty="0">
                 <a:solidFill>
                   <a:srgbClr val="555555"/>
                 </a:solidFill>
               </a:rPr>
-              <a:t>7 / 12</a:t>
-            </a:r>
+              <a:t>7 / </a:t>
+            </a:r>
+            <a:r>
+              <a:rPr lang="en-US" sz="1000" b="0" dirty="0">
+                <a:solidFill>
+                  <a:srgbClr val="555555"/>
+                </a:solidFill>
+              </a:rPr>
+              <a:t>11</a:t>
+            </a:r>
+            <a:endParaRPr sz="1000" b="0" dirty="0">
+              <a:solidFill>
+                <a:srgbClr val="555555"/>
+              </a:solidFill>
+            </a:endParaRPr>
           </a:p>
         </p:txBody>
       </p:sp>
@@ -9037,28 +8884,48 @@
         <p:spPr>
           <a:xfrm>
             <a:off x="365760" y="6446520"/>
-            <a:ext cx="7315200" cy="274320"/>
-          </a:xfrm>
-          <a:prstGeom prst="rect">
-            <a:avLst/>
-          </a:prstGeom>
-          <a:noFill/>
-        </p:spPr>
-        <p:txBody>
-          <a:bodyPr wrap="square" lIns="45720" rIns="45720" tIns="18288" bIns="18288">
-            <a:spAutoFit/>
-          </a:bodyPr>
-          <a:lstStyle/>
-          <a:p>
-            <a:pPr algn="l"/>
-            <a:r>
-              <a:rPr sz="1000" b="0">
+            <a:ext cx="7315200" cy="190821"/>
+          </a:xfrm>
+          <a:prstGeom prst="rect">
+            <a:avLst/>
+          </a:prstGeom>
+          <a:noFill/>
+        </p:spPr>
+        <p:txBody>
+          <a:bodyPr wrap="square" lIns="45720" tIns="18288" rIns="45720" bIns="18288">
+            <a:spAutoFit/>
+          </a:bodyPr>
+          <a:lstStyle/>
+          <a:p>
+            <a:r>
+              <a:rPr sz="1000" b="0" dirty="0">
                 <a:solidFill>
                   <a:srgbClr val="555555"/>
                 </a:solidFill>
               </a:rPr>
               <a:t>Kickstarter Pre-Launch Recommender  ·  Omar Doughan</a:t>
             </a:r>
+            <a:r>
+              <a:rPr lang="en-US" sz="1000" b="0" dirty="0">
+                <a:solidFill>
+                  <a:srgbClr val="555555"/>
+                </a:solidFill>
+              </a:rPr>
+              <a:t> </a:t>
+            </a:r>
+            <a:r>
+              <a:rPr lang="en-US" sz="1000" dirty="0">
+                <a:solidFill>
+                  <a:srgbClr val="555555"/>
+                </a:solidFill>
+              </a:rPr>
+              <a:t> ·  Ryan Masri</a:t>
+            </a:r>
+            <a:endParaRPr sz="1000" b="0" dirty="0">
+              <a:solidFill>
+                <a:srgbClr val="555555"/>
+              </a:solidFill>
+            </a:endParaRPr>
           </a:p>
         </p:txBody>
       </p:sp>
@@ -9071,7 +8938,7 @@
 </file>
 
 <file path=ppt/slides/slide8.xml><?xml version="1.0" encoding="utf-8"?>
-<p:sld xmlns:a="http://schemas.openxmlformats.org/drawingml/2006/main" xmlns:p="http://schemas.openxmlformats.org/presentationml/2006/main" xmlns:r="http://schemas.openxmlformats.org/officeDocument/2006/relationships">
+<p:sld xmlns:a="http://schemas.openxmlformats.org/drawingml/2006/main" xmlns:r="http://schemas.openxmlformats.org/officeDocument/2006/relationships" xmlns:p="http://schemas.openxmlformats.org/presentationml/2006/main">
   <p:cSld>
     <p:spTree>
       <p:nvGrpSpPr>
@@ -9079,7 +8946,14 @@
         <p:cNvGrpSpPr/>
         <p:nvPr/>
       </p:nvGrpSpPr>
-      <p:grpSpPr/>
+      <p:grpSpPr>
+        <a:xfrm>
+          <a:off x="0" y="0"/>
+          <a:ext cx="0" cy="0"/>
+          <a:chOff x="0" y="0"/>
+          <a:chExt cx="0" cy="0"/>
+        </a:xfrm>
+      </p:grpSpPr>
       <p:sp>
         <p:nvSpPr>
           <p:cNvPr id="2" name="Rectangle 1"/>
@@ -9120,6 +8994,7 @@
           <a:lstStyle/>
           <a:p>
             <a:pPr algn="ctr"/>
+            <a:endParaRPr/>
           </a:p>
         </p:txBody>
       </p:sp>
@@ -9163,40 +9038,7 @@
           <a:lstStyle/>
           <a:p>
             <a:pPr algn="ctr"/>
-          </a:p>
-        </p:txBody>
-      </p:sp>
-      <p:sp>
-        <p:nvSpPr>
-          <p:cNvPr id="4" name="TextBox 3"/>
-          <p:cNvSpPr txBox="1"/>
-          <p:nvPr/>
-        </p:nvSpPr>
-        <p:spPr>
-          <a:xfrm>
-            <a:off x="365760" y="109728"/>
-            <a:ext cx="5486400" cy="365760"/>
-          </a:xfrm>
-          <a:prstGeom prst="rect">
-            <a:avLst/>
-          </a:prstGeom>
-          <a:noFill/>
-        </p:spPr>
-        <p:txBody>
-          <a:bodyPr wrap="square" lIns="45720" rIns="45720" tIns="18288" bIns="18288">
-            <a:spAutoFit/>
-          </a:bodyPr>
-          <a:lstStyle/>
-          <a:p>
-            <a:pPr algn="l"/>
-            <a:r>
-              <a:rPr sz="1200" b="1">
-                <a:solidFill>
-                  <a:srgbClr val="FFFFFF"/>
-                </a:solidFill>
-              </a:rPr>
-              <a:t>PR4  ·  HONEST FINDING</a:t>
-            </a:r>
+            <a:endParaRPr/>
           </a:p>
         </p:txBody>
       </p:sp>
@@ -9217,7 +9059,7 @@
           <a:noFill/>
         </p:spPr>
         <p:txBody>
-          <a:bodyPr wrap="square" lIns="45720" rIns="45720" tIns="18288" bIns="18288">
+          <a:bodyPr wrap="square" lIns="45720" tIns="18288" rIns="45720" bIns="18288">
             <a:spAutoFit/>
           </a:bodyPr>
           <a:lstStyle/>
@@ -9243,22 +9085,22 @@
         <p:spPr>
           <a:xfrm>
             <a:off x="548640" y="1737360"/>
-            <a:ext cx="10972800" cy="914400"/>
-          </a:xfrm>
-          <a:prstGeom prst="rect">
-            <a:avLst/>
-          </a:prstGeom>
-          <a:noFill/>
-        </p:spPr>
-        <p:txBody>
-          <a:bodyPr wrap="square" lIns="45720" rIns="45720" tIns="18288" bIns="18288">
+            <a:ext cx="10972800" cy="344710"/>
+          </a:xfrm>
+          <a:prstGeom prst="rect">
+            <a:avLst/>
+          </a:prstGeom>
+          <a:noFill/>
+        </p:spPr>
+        <p:txBody>
+          <a:bodyPr wrap="square" lIns="45720" tIns="18288" rIns="45720" bIns="18288">
             <a:spAutoFit/>
           </a:bodyPr>
           <a:lstStyle/>
           <a:p>
             <a:pPr algn="l"/>
             <a:r>
-              <a:rPr sz="1800" b="0">
+              <a:rPr sz="2000" b="0" dirty="0">
                 <a:solidFill>
                   <a:srgbClr val="122A4F"/>
                 </a:solidFill>
@@ -9310,6 +9152,7 @@
           <a:lstStyle/>
           <a:p>
             <a:pPr algn="ctr"/>
+            <a:endParaRPr/>
           </a:p>
         </p:txBody>
       </p:sp>
@@ -9330,7 +9173,7 @@
           <a:noFill/>
         </p:spPr>
         <p:txBody>
-          <a:bodyPr wrap="square" lIns="45720" rIns="45720" tIns="18288" bIns="18288">
+          <a:bodyPr wrap="square" lIns="45720" tIns="18288" rIns="45720" bIns="18288">
             <a:spAutoFit/>
           </a:bodyPr>
           <a:lstStyle/>
@@ -9364,7 +9207,7 @@
           <a:noFill/>
         </p:spPr>
         <p:txBody>
-          <a:bodyPr wrap="square" lIns="45720" rIns="45720" tIns="18288" bIns="18288">
+          <a:bodyPr wrap="square" lIns="45720" tIns="18288" rIns="45720" bIns="18288">
             <a:spAutoFit/>
           </a:bodyPr>
           <a:lstStyle/>
@@ -9398,7 +9241,7 @@
           <a:noFill/>
         </p:spPr>
         <p:txBody>
-          <a:bodyPr wrap="square" lIns="45720" rIns="45720" tIns="18288" bIns="18288">
+          <a:bodyPr wrap="square" lIns="45720" tIns="18288" rIns="45720" bIns="18288">
             <a:spAutoFit/>
           </a:bodyPr>
           <a:lstStyle/>
@@ -9432,7 +9275,7 @@
           <a:noFill/>
         </p:spPr>
         <p:txBody>
-          <a:bodyPr wrap="square" lIns="45720" rIns="45720" tIns="18288" bIns="18288">
+          <a:bodyPr wrap="square" lIns="45720" tIns="18288" rIns="45720" bIns="18288">
             <a:spAutoFit/>
           </a:bodyPr>
           <a:lstStyle/>
@@ -9466,7 +9309,7 @@
           <a:noFill/>
         </p:spPr>
         <p:txBody>
-          <a:bodyPr wrap="square" lIns="45720" rIns="45720" tIns="18288" bIns="18288">
+          <a:bodyPr wrap="square" lIns="45720" tIns="18288" rIns="45720" bIns="18288">
             <a:spAutoFit/>
           </a:bodyPr>
           <a:lstStyle/>
@@ -9492,28 +9335,41 @@
         <p:spPr>
           <a:xfrm>
             <a:off x="10515600" y="6446520"/>
-            <a:ext cx="1554480" cy="274320"/>
-          </a:xfrm>
-          <a:prstGeom prst="rect">
-            <a:avLst/>
-          </a:prstGeom>
-          <a:noFill/>
-        </p:spPr>
-        <p:txBody>
-          <a:bodyPr wrap="square" lIns="45720" rIns="45720" tIns="18288" bIns="18288">
+            <a:ext cx="1554480" cy="190821"/>
+          </a:xfrm>
+          <a:prstGeom prst="rect">
+            <a:avLst/>
+          </a:prstGeom>
+          <a:noFill/>
+        </p:spPr>
+        <p:txBody>
+          <a:bodyPr wrap="square" lIns="45720" tIns="18288" rIns="45720" bIns="18288">
             <a:spAutoFit/>
           </a:bodyPr>
           <a:lstStyle/>
           <a:p>
             <a:pPr algn="r"/>
             <a:r>
-              <a:rPr sz="1000" b="0">
+              <a:rPr sz="1000" b="0" dirty="0">
                 <a:solidFill>
                   <a:srgbClr val="555555"/>
                 </a:solidFill>
               </a:rPr>
-              <a:t>8 / 12</a:t>
-            </a:r>
+              <a:t>8 / </a:t>
+            </a:r>
+            <a:r>
+              <a:rPr lang="en-US" sz="1000" b="0" dirty="0">
+                <a:solidFill>
+                  <a:srgbClr val="555555"/>
+                </a:solidFill>
+              </a:rPr>
+              <a:t>11</a:t>
+            </a:r>
+            <a:endParaRPr sz="1000" b="0" dirty="0">
+              <a:solidFill>
+                <a:srgbClr val="555555"/>
+              </a:solidFill>
+            </a:endParaRPr>
           </a:p>
         </p:txBody>
       </p:sp>
@@ -9526,28 +9382,48 @@
         <p:spPr>
           <a:xfrm>
             <a:off x="365760" y="6446520"/>
-            <a:ext cx="7315200" cy="274320"/>
-          </a:xfrm>
-          <a:prstGeom prst="rect">
-            <a:avLst/>
-          </a:prstGeom>
-          <a:noFill/>
-        </p:spPr>
-        <p:txBody>
-          <a:bodyPr wrap="square" lIns="45720" rIns="45720" tIns="18288" bIns="18288">
-            <a:spAutoFit/>
-          </a:bodyPr>
-          <a:lstStyle/>
-          <a:p>
-            <a:pPr algn="l"/>
-            <a:r>
-              <a:rPr sz="1000" b="0">
+            <a:ext cx="7315200" cy="190821"/>
+          </a:xfrm>
+          <a:prstGeom prst="rect">
+            <a:avLst/>
+          </a:prstGeom>
+          <a:noFill/>
+        </p:spPr>
+        <p:txBody>
+          <a:bodyPr wrap="square" lIns="45720" tIns="18288" rIns="45720" bIns="18288">
+            <a:spAutoFit/>
+          </a:bodyPr>
+          <a:lstStyle/>
+          <a:p>
+            <a:r>
+              <a:rPr sz="1000" b="0" dirty="0">
                 <a:solidFill>
                   <a:srgbClr val="555555"/>
                 </a:solidFill>
               </a:rPr>
               <a:t>Kickstarter Pre-Launch Recommender  ·  Omar Doughan</a:t>
             </a:r>
+            <a:r>
+              <a:rPr lang="en-US" sz="1000" b="0" dirty="0">
+                <a:solidFill>
+                  <a:srgbClr val="555555"/>
+                </a:solidFill>
+              </a:rPr>
+              <a:t> </a:t>
+            </a:r>
+            <a:r>
+              <a:rPr lang="en-US" sz="1000" dirty="0">
+                <a:solidFill>
+                  <a:srgbClr val="555555"/>
+                </a:solidFill>
+              </a:rPr>
+              <a:t> ·  Ryan Masri</a:t>
+            </a:r>
+            <a:endParaRPr sz="1000" b="0" dirty="0">
+              <a:solidFill>
+                <a:srgbClr val="555555"/>
+              </a:solidFill>
+            </a:endParaRPr>
           </a:p>
         </p:txBody>
       </p:sp>
@@ -9560,7 +9436,7 @@
 </file>
 
 <file path=ppt/slides/slide9.xml><?xml version="1.0" encoding="utf-8"?>
-<p:sld xmlns:a="http://schemas.openxmlformats.org/drawingml/2006/main" xmlns:p="http://schemas.openxmlformats.org/presentationml/2006/main" xmlns:r="http://schemas.openxmlformats.org/officeDocument/2006/relationships">
+<p:sld xmlns:a="http://schemas.openxmlformats.org/drawingml/2006/main" xmlns:r="http://schemas.openxmlformats.org/officeDocument/2006/relationships" xmlns:p="http://schemas.openxmlformats.org/presentationml/2006/main">
   <p:cSld>
     <p:spTree>
       <p:nvGrpSpPr>
@@ -9568,7 +9444,14 @@
         <p:cNvGrpSpPr/>
         <p:nvPr/>
       </p:nvGrpSpPr>
-      <p:grpSpPr/>
+      <p:grpSpPr>
+        <a:xfrm>
+          <a:off x="0" y="0"/>
+          <a:ext cx="0" cy="0"/>
+          <a:chOff x="0" y="0"/>
+          <a:chExt cx="0" cy="0"/>
+        </a:xfrm>
+      </p:grpSpPr>
       <p:sp>
         <p:nvSpPr>
           <p:cNvPr id="2" name="Rectangle 1"/>
@@ -9609,6 +9492,7 @@
           <a:lstStyle/>
           <a:p>
             <a:pPr algn="ctr"/>
+            <a:endParaRPr/>
           </a:p>
         </p:txBody>
       </p:sp>
@@ -9652,40 +9536,7 @@
           <a:lstStyle/>
           <a:p>
             <a:pPr algn="ctr"/>
-          </a:p>
-        </p:txBody>
-      </p:sp>
-      <p:sp>
-        <p:nvSpPr>
-          <p:cNvPr id="4" name="TextBox 3"/>
-          <p:cNvSpPr txBox="1"/>
-          <p:nvPr/>
-        </p:nvSpPr>
-        <p:spPr>
-          <a:xfrm>
-            <a:off x="365760" y="109728"/>
-            <a:ext cx="5486400" cy="365760"/>
-          </a:xfrm>
-          <a:prstGeom prst="rect">
-            <a:avLst/>
-          </a:prstGeom>
-          <a:noFill/>
-        </p:spPr>
-        <p:txBody>
-          <a:bodyPr wrap="square" lIns="45720" rIns="45720" tIns="18288" bIns="18288">
-            <a:spAutoFit/>
-          </a:bodyPr>
-          <a:lstStyle/>
-          <a:p>
-            <a:pPr algn="l"/>
-            <a:r>
-              <a:rPr sz="1200" b="1">
-                <a:solidFill>
-                  <a:srgbClr val="FFFFFF"/>
-                </a:solidFill>
-              </a:rPr>
-              <a:t>PR3  ·  DEMO</a:t>
-            </a:r>
+            <a:endParaRPr/>
           </a:p>
         </p:txBody>
       </p:sp>
@@ -9706,7 +9557,7 @@
           <a:noFill/>
         </p:spPr>
         <p:txBody>
-          <a:bodyPr wrap="square" lIns="45720" rIns="45720" tIns="18288" bIns="18288">
+          <a:bodyPr wrap="square" lIns="45720" tIns="18288" rIns="45720" bIns="18288">
             <a:spAutoFit/>
           </a:bodyPr>
           <a:lstStyle/>
@@ -9732,7 +9583,7 @@
         <p:spPr>
           <a:xfrm>
             <a:off x="548640" y="1737360"/>
-            <a:ext cx="10972800" cy="3200400"/>
+            <a:ext cx="10972800" cy="2554545"/>
           </a:xfrm>
           <a:prstGeom prst="rect">
             <a:avLst/>
@@ -9746,27 +9597,49 @@
           <a:lstStyle/>
           <a:p>
             <a:pPr algn="l">
+              <a:spcBef>
+                <a:spcPts val="800"/>
+              </a:spcBef>
               <a:spcAft>
                 <a:spcPts val="800"/>
               </a:spcAft>
             </a:pPr>
             <a:r>
-              <a:rPr sz="1800">
+              <a:rPr sz="2000" dirty="0">
                 <a:solidFill>
                   <a:srgbClr val="122A4F"/>
                 </a:solidFill>
               </a:rPr>
-              <a:t>•  Streamlit app, Docker SDK, free CPU tier, private (collaborator access).</a:t>
+              <a:t>•  </a:t>
+            </a:r>
+            <a:r>
+              <a:rPr sz="2000" dirty="0" err="1">
+                <a:solidFill>
+                  <a:srgbClr val="122A4F"/>
+                </a:solidFill>
+              </a:rPr>
+              <a:t>Streamlit</a:t>
+            </a:r>
+            <a:r>
+              <a:rPr sz="2000" dirty="0">
+                <a:solidFill>
+                  <a:srgbClr val="122A4F"/>
+                </a:solidFill>
+              </a:rPr>
+              <a:t> app, Docker SDK, free CPU tier, private (collaborator access).</a:t>
             </a:r>
           </a:p>
           <a:p>
             <a:pPr algn="l">
+              <a:spcBef>
+                <a:spcPts val="800"/>
+              </a:spcBef>
               <a:spcAft>
                 <a:spcPts val="800"/>
               </a:spcAft>
             </a:pPr>
             <a:r>
-              <a:rPr sz="1800">
+              <a:rPr sz="2000" dirty="0">
                 <a:solidFill>
                   <a:srgbClr val="122A4F"/>
                 </a:solidFill>
@@ -9776,12 +9649,15 @@
           </a:p>
           <a:p>
             <a:pPr algn="l">
+              <a:spcBef>
+                <a:spcPts val="800"/>
+              </a:spcBef>
               <a:spcAft>
                 <a:spcPts val="800"/>
               </a:spcAft>
             </a:pPr>
             <a:r>
-              <a:rPr sz="1800">
+              <a:rPr sz="2000" dirty="0">
                 <a:solidFill>
                   <a:srgbClr val="122A4F"/>
                 </a:solidFill>
@@ -9791,17 +9667,36 @@
           </a:p>
           <a:p>
             <a:pPr algn="l">
+              <a:spcBef>
+                <a:spcPts val="800"/>
+              </a:spcBef>
               <a:spcAft>
                 <a:spcPts val="800"/>
               </a:spcAft>
             </a:pPr>
             <a:r>
-              <a:rPr sz="1800">
+              <a:rPr sz="2000" dirty="0">
                 <a:solidFill>
                   <a:srgbClr val="122A4F"/>
                 </a:solidFill>
               </a:rPr>
-              <a:t>•  Ships the tabular XGBoost (8.5 MB).  Full 596k-feature model is too large for a free demo — we trade ~4 AUROC points for portability.</a:t>
+              <a:t>•  Ships the tabular </a:t>
+            </a:r>
+            <a:r>
+              <a:rPr sz="2000" dirty="0" err="1">
+                <a:solidFill>
+                  <a:srgbClr val="122A4F"/>
+                </a:solidFill>
+              </a:rPr>
+              <a:t>XGBoost</a:t>
+            </a:r>
+            <a:r>
+              <a:rPr sz="2000" dirty="0">
+                <a:solidFill>
+                  <a:srgbClr val="122A4F"/>
+                </a:solidFill>
+              </a:rPr>
+              <a:t> (8.5 MB).  Full 596k-feature model is too large for a free demo — we trade ~4 AUROC points for portability.</a:t>
             </a:r>
           </a:p>
         </p:txBody>
@@ -9848,6 +9743,7 @@
           <a:lstStyle/>
           <a:p>
             <a:pPr algn="ctr"/>
+            <a:endParaRPr/>
           </a:p>
         </p:txBody>
       </p:sp>
@@ -9868,7 +9764,7 @@
           <a:noFill/>
         </p:spPr>
         <p:txBody>
-          <a:bodyPr wrap="square" lIns="45720" rIns="45720" tIns="18288" bIns="18288">
+          <a:bodyPr wrap="square" lIns="45720" tIns="18288" rIns="45720" bIns="18288">
             <a:spAutoFit/>
           </a:bodyPr>
           <a:lstStyle/>
@@ -9894,28 +9790,41 @@
         <p:spPr>
           <a:xfrm>
             <a:off x="10515600" y="6446520"/>
-            <a:ext cx="1554480" cy="274320"/>
-          </a:xfrm>
-          <a:prstGeom prst="rect">
-            <a:avLst/>
-          </a:prstGeom>
-          <a:noFill/>
-        </p:spPr>
-        <p:txBody>
-          <a:bodyPr wrap="square" lIns="45720" rIns="45720" tIns="18288" bIns="18288">
+            <a:ext cx="1554480" cy="190821"/>
+          </a:xfrm>
+          <a:prstGeom prst="rect">
+            <a:avLst/>
+          </a:prstGeom>
+          <a:noFill/>
+        </p:spPr>
+        <p:txBody>
+          <a:bodyPr wrap="square" lIns="45720" tIns="18288" rIns="45720" bIns="18288">
             <a:spAutoFit/>
           </a:bodyPr>
           <a:lstStyle/>
           <a:p>
             <a:pPr algn="r"/>
             <a:r>
-              <a:rPr sz="1000" b="0">
+              <a:rPr sz="1000" b="0" dirty="0">
                 <a:solidFill>
                   <a:srgbClr val="555555"/>
                 </a:solidFill>
               </a:rPr>
-              <a:t>9 / 12</a:t>
-            </a:r>
+              <a:t>9 / </a:t>
+            </a:r>
+            <a:r>
+              <a:rPr lang="en-US" sz="1000" b="0" dirty="0">
+                <a:solidFill>
+                  <a:srgbClr val="555555"/>
+                </a:solidFill>
+              </a:rPr>
+              <a:t>11</a:t>
+            </a:r>
+            <a:endParaRPr sz="1000" b="0" dirty="0">
+              <a:solidFill>
+                <a:srgbClr val="555555"/>
+              </a:solidFill>
+            </a:endParaRPr>
           </a:p>
         </p:txBody>
       </p:sp>
@@ -9928,28 +9837,48 @@
         <p:spPr>
           <a:xfrm>
             <a:off x="365760" y="6446520"/>
-            <a:ext cx="7315200" cy="274320"/>
-          </a:xfrm>
-          <a:prstGeom prst="rect">
-            <a:avLst/>
-          </a:prstGeom>
-          <a:noFill/>
-        </p:spPr>
-        <p:txBody>
-          <a:bodyPr wrap="square" lIns="45720" rIns="45720" tIns="18288" bIns="18288">
-            <a:spAutoFit/>
-          </a:bodyPr>
-          <a:lstStyle/>
-          <a:p>
-            <a:pPr algn="l"/>
-            <a:r>
-              <a:rPr sz="1000" b="0">
+            <a:ext cx="7315200" cy="190821"/>
+          </a:xfrm>
+          <a:prstGeom prst="rect">
+            <a:avLst/>
+          </a:prstGeom>
+          <a:noFill/>
+        </p:spPr>
+        <p:txBody>
+          <a:bodyPr wrap="square" lIns="45720" tIns="18288" rIns="45720" bIns="18288">
+            <a:spAutoFit/>
+          </a:bodyPr>
+          <a:lstStyle/>
+          <a:p>
+            <a:r>
+              <a:rPr sz="1000" b="0" dirty="0">
                 <a:solidFill>
                   <a:srgbClr val="555555"/>
                 </a:solidFill>
               </a:rPr>
               <a:t>Kickstarter Pre-Launch Recommender  ·  Omar Doughan</a:t>
             </a:r>
+            <a:r>
+              <a:rPr lang="en-US" sz="1000" b="0" dirty="0">
+                <a:solidFill>
+                  <a:srgbClr val="555555"/>
+                </a:solidFill>
+              </a:rPr>
+              <a:t> </a:t>
+            </a:r>
+            <a:r>
+              <a:rPr lang="en-US" sz="1000" dirty="0">
+                <a:solidFill>
+                  <a:srgbClr val="555555"/>
+                </a:solidFill>
+              </a:rPr>
+              <a:t> ·  Ryan Masri</a:t>
+            </a:r>
+            <a:endParaRPr sz="1000" b="0" dirty="0">
+              <a:solidFill>
+                <a:srgbClr val="555555"/>
+              </a:solidFill>
+            </a:endParaRPr>
           </a:p>
         </p:txBody>
       </p:sp>
